--- a/00 PRESENTACIONES compartida alumnos/ED04n - POO.pptx
+++ b/00 PRESENTACIONES compartida alumnos/ED04n - POO.pptx
@@ -51,7 +51,7 @@
       <p:boldItalic r:id="rId35"/>
     </p:embeddedFont>
     <p:embeddedFont>
-      <p:font typeface="Wingdings 3" panose="05040102010807070707" pitchFamily="18" charset="2"/>
+      <p:font typeface="Wingdings 3" panose="020B0604020202020204" charset="2"/>
       <p:regular r:id="rId36"/>
     </p:embeddedFont>
   </p:embeddedFontLst>
@@ -165,9 +165,6 @@
         </p15:guide>
       </p15:sldGuideLst>
     </p:ext>
-    <p:ext uri="{2D200454-40CA-4A62-9FC3-DE9A4176ACB9}">
-      <p15:notesGuideLst xmlns:p15="http://schemas.microsoft.com/office/powerpoint/2012/main"/>
-    </p:ext>
   </p:extLst>
 </p:presentation>
 </file>
@@ -188,7 +185,7 @@
 <file path=ppt/revisionInfo.xml><?xml version="1.0" encoding="utf-8"?>
 <p1510:revInfo xmlns:a="http://schemas.openxmlformats.org/drawingml/2006/main" xmlns:r="http://schemas.openxmlformats.org/officeDocument/2006/relationships" xmlns:p1510="http://schemas.microsoft.com/office/powerpoint/2015/10/main">
   <p1510:revLst>
-    <p1510:client id="{2F2F11DA-E17F-4203-A18A-7BD3C4FC5EFB}" v="23" dt="2025-07-08T15:24:25.823"/>
+    <p1510:client id="{E0FC8BC7-8B0B-43B8-9EF2-C002B4913544}" v="128" dt="2026-01-16T08:15:16.023"/>
   </p1510:revLst>
 </p1510:revInfo>
 </file>
@@ -196,1375 +193,171 @@
 <file path=ppt/changesInfos/changesInfo1.xml><?xml version="1.0" encoding="utf-8"?>
 <pc:chgInfo xmlns:a="http://schemas.openxmlformats.org/drawingml/2006/main" xmlns:r="http://schemas.openxmlformats.org/officeDocument/2006/relationships" xmlns:ac="http://schemas.microsoft.com/office/drawing/2013/main/command" xmlns:pc="http://schemas.microsoft.com/office/powerpoint/2013/main/command">
   <pc:docChgLst>
-    <pc:chgData name="MIGUEL TRIGUEROS MUÑOZ" userId="S::miguel.trigueros@aulaxxi.murciaeduca.es::a4ee0321-97d7-430f-98a8-7ed13ff9a4bf" providerId="AD" clId="Web-{4C64F3AE-4E31-03D6-4D94-DCFF0066B3FD}"/>
-    <pc:docChg chg="modSld">
-      <pc:chgData name="MIGUEL TRIGUEROS MUÑOZ" userId="S::miguel.trigueros@aulaxxi.murciaeduca.es::a4ee0321-97d7-430f-98a8-7ed13ff9a4bf" providerId="AD" clId="Web-{4C64F3AE-4E31-03D6-4D94-DCFF0066B3FD}" dt="2025-01-28T08:29:21.213" v="3" actId="20577"/>
+    <pc:chgData name="MIGUEL TRIGUEROS MUÑOZ" userId="a4ee0321-97d7-430f-98a8-7ed13ff9a4bf" providerId="ADAL" clId="{6EE8E80F-F211-4A9B-9011-A3407143D2A0}"/>
+    <pc:docChg chg="custSel modSld">
+      <pc:chgData name="MIGUEL TRIGUEROS MUÑOZ" userId="a4ee0321-97d7-430f-98a8-7ed13ff9a4bf" providerId="ADAL" clId="{6EE8E80F-F211-4A9B-9011-A3407143D2A0}" dt="2026-01-16T08:15:16.023" v="135" actId="1076"/>
       <pc:docMkLst>
         <pc:docMk/>
       </pc:docMkLst>
-      <pc:sldChg chg="modSp">
-        <pc:chgData name="MIGUEL TRIGUEROS MUÑOZ" userId="S::miguel.trigueros@aulaxxi.murciaeduca.es::a4ee0321-97d7-430f-98a8-7ed13ff9a4bf" providerId="AD" clId="Web-{4C64F3AE-4E31-03D6-4D94-DCFF0066B3FD}" dt="2025-01-28T08:29:21.213" v="3" actId="20577"/>
-        <pc:sldMkLst>
-          <pc:docMk/>
-          <pc:sldMk cId="2896794478" sldId="348"/>
-        </pc:sldMkLst>
-      </pc:sldChg>
-    </pc:docChg>
-  </pc:docChgLst>
-  <pc:docChgLst>
-    <pc:chgData name="MIGUEL TRIGUEROS MUÑOZ" userId="a4ee0321-97d7-430f-98a8-7ed13ff9a4bf" providerId="ADAL" clId="{1A2524F0-11E5-48C4-86DF-E5310B4EF233}"/>
-    <pc:docChg chg="undo custSel modSld sldOrd">
-      <pc:chgData name="MIGUEL TRIGUEROS MUÑOZ" userId="a4ee0321-97d7-430f-98a8-7ed13ff9a4bf" providerId="ADAL" clId="{1A2524F0-11E5-48C4-86DF-E5310B4EF233}" dt="2024-02-14T08:19:21.813" v="67"/>
-      <pc:docMkLst>
-        <pc:docMk/>
-      </pc:docMkLst>
-      <pc:sldChg chg="modSp mod">
-        <pc:chgData name="MIGUEL TRIGUEROS MUÑOZ" userId="a4ee0321-97d7-430f-98a8-7ed13ff9a4bf" providerId="ADAL" clId="{1A2524F0-11E5-48C4-86DF-E5310B4EF233}" dt="2024-02-12T10:05:01.091" v="18" actId="20577"/>
-        <pc:sldMkLst>
-          <pc:docMk/>
-          <pc:sldMk cId="3948044143" sldId="320"/>
-        </pc:sldMkLst>
-      </pc:sldChg>
-      <pc:sldChg chg="modSp mod">
-        <pc:chgData name="MIGUEL TRIGUEROS MUÑOZ" userId="a4ee0321-97d7-430f-98a8-7ed13ff9a4bf" providerId="ADAL" clId="{1A2524F0-11E5-48C4-86DF-E5310B4EF233}" dt="2024-02-12T11:16:42.669" v="61" actId="15"/>
-        <pc:sldMkLst>
-          <pc:docMk/>
-          <pc:sldMk cId="94322529" sldId="326"/>
-        </pc:sldMkLst>
-      </pc:sldChg>
-      <pc:sldChg chg="modSp mod">
-        <pc:chgData name="MIGUEL TRIGUEROS MUÑOZ" userId="a4ee0321-97d7-430f-98a8-7ed13ff9a4bf" providerId="ADAL" clId="{1A2524F0-11E5-48C4-86DF-E5310B4EF233}" dt="2024-02-14T08:18:49.180" v="65" actId="27636"/>
-        <pc:sldMkLst>
-          <pc:docMk/>
-          <pc:sldMk cId="270283012" sldId="336"/>
-        </pc:sldMkLst>
-      </pc:sldChg>
-      <pc:sldChg chg="ord">
-        <pc:chgData name="MIGUEL TRIGUEROS MUÑOZ" userId="a4ee0321-97d7-430f-98a8-7ed13ff9a4bf" providerId="ADAL" clId="{1A2524F0-11E5-48C4-86DF-E5310B4EF233}" dt="2024-02-14T08:19:21.813" v="67"/>
-        <pc:sldMkLst>
-          <pc:docMk/>
-          <pc:sldMk cId="3066266296" sldId="337"/>
-        </pc:sldMkLst>
-      </pc:sldChg>
-    </pc:docChg>
-  </pc:docChgLst>
-  <pc:docChgLst>
-    <pc:chgData name="MIGUEL TRIGUEROS MUÑOZ" userId="a4ee0321-97d7-430f-98a8-7ed13ff9a4bf" providerId="ADAL" clId="{FFADFD39-9680-42B3-B006-3D676F5B4DF6}"/>
-    <pc:docChg chg="undo custSel modSld">
-      <pc:chgData name="MIGUEL TRIGUEROS MUÑOZ" userId="a4ee0321-97d7-430f-98a8-7ed13ff9a4bf" providerId="ADAL" clId="{FFADFD39-9680-42B3-B006-3D676F5B4DF6}" dt="2024-10-11T08:04:46.929" v="2" actId="478"/>
-      <pc:docMkLst>
-        <pc:docMk/>
-      </pc:docMkLst>
-      <pc:sldChg chg="addSp delSp mod">
-        <pc:chgData name="MIGUEL TRIGUEROS MUÑOZ" userId="a4ee0321-97d7-430f-98a8-7ed13ff9a4bf" providerId="ADAL" clId="{FFADFD39-9680-42B3-B006-3D676F5B4DF6}" dt="2024-10-11T08:04:46.929" v="2" actId="478"/>
+      <pc:sldChg chg="addSp modSp mod">
+        <pc:chgData name="MIGUEL TRIGUEROS MUÑOZ" userId="a4ee0321-97d7-430f-98a8-7ed13ff9a4bf" providerId="ADAL" clId="{6EE8E80F-F211-4A9B-9011-A3407143D2A0}" dt="2026-01-09T07:58:04.854" v="8" actId="255"/>
         <pc:sldMkLst>
           <pc:docMk/>
           <pc:sldMk cId="745458148" sldId="314"/>
         </pc:sldMkLst>
+        <pc:spChg chg="mod">
+          <ac:chgData name="MIGUEL TRIGUEROS MUÑOZ" userId="a4ee0321-97d7-430f-98a8-7ed13ff9a4bf" providerId="ADAL" clId="{6EE8E80F-F211-4A9B-9011-A3407143D2A0}" dt="2026-01-09T07:57:50.544" v="5" actId="1076"/>
+          <ac:spMkLst>
+            <pc:docMk/>
+            <pc:sldMk cId="745458148" sldId="314"/>
+            <ac:spMk id="3" creationId="{B6D7D569-2E40-41FB-F9B2-C2262085590C}"/>
+          </ac:spMkLst>
+        </pc:spChg>
+        <pc:spChg chg="add mod">
+          <ac:chgData name="MIGUEL TRIGUEROS MUÑOZ" userId="a4ee0321-97d7-430f-98a8-7ed13ff9a4bf" providerId="ADAL" clId="{6EE8E80F-F211-4A9B-9011-A3407143D2A0}" dt="2026-01-09T07:58:04.854" v="8" actId="255"/>
+          <ac:spMkLst>
+            <pc:docMk/>
+            <pc:sldMk cId="745458148" sldId="314"/>
+            <ac:spMk id="6" creationId="{99A0FB2D-9175-B35C-E0B6-DF5046D0407F}"/>
+          </ac:spMkLst>
+        </pc:spChg>
       </pc:sldChg>
-    </pc:docChg>
-  </pc:docChgLst>
-  <pc:docChgLst>
-    <pc:chgData name="MIGUEL TRIGUEROS MUÑOZ" userId="a4ee0321-97d7-430f-98a8-7ed13ff9a4bf" providerId="ADAL" clId="{7FF4009E-7E0A-474D-9D1C-EDE0B6456BB9}"/>
-    <pc:docChg chg="undo custSel addSld delSld modSld modSection">
-      <pc:chgData name="MIGUEL TRIGUEROS MUÑOZ" userId="a4ee0321-97d7-430f-98a8-7ed13ff9a4bf" providerId="ADAL" clId="{7FF4009E-7E0A-474D-9D1C-EDE0B6456BB9}" dt="2024-12-13T08:48:58.078" v="203" actId="33524"/>
-      <pc:docMkLst>
-        <pc:docMk/>
-      </pc:docMkLst>
-      <pc:sldChg chg="modSp mod">
-        <pc:chgData name="MIGUEL TRIGUEROS MUÑOZ" userId="a4ee0321-97d7-430f-98a8-7ed13ff9a4bf" providerId="ADAL" clId="{7FF4009E-7E0A-474D-9D1C-EDE0B6456BB9}" dt="2024-12-13T08:43:38.802" v="4" actId="20577"/>
-        <pc:sldMkLst>
-          <pc:docMk/>
-          <pc:sldMk cId="308865771" sldId="256"/>
-        </pc:sldMkLst>
-      </pc:sldChg>
-      <pc:sldChg chg="modSp mod">
-        <pc:chgData name="MIGUEL TRIGUEROS MUÑOZ" userId="a4ee0321-97d7-430f-98a8-7ed13ff9a4bf" providerId="ADAL" clId="{7FF4009E-7E0A-474D-9D1C-EDE0B6456BB9}" dt="2024-12-13T08:45:07.002" v="15" actId="14100"/>
-        <pc:sldMkLst>
-          <pc:docMk/>
-          <pc:sldMk cId="745458148" sldId="314"/>
-        </pc:sldMkLst>
-      </pc:sldChg>
-      <pc:sldChg chg="modSp add del mod">
-        <pc:chgData name="MIGUEL TRIGUEROS MUÑOZ" userId="a4ee0321-97d7-430f-98a8-7ed13ff9a4bf" providerId="ADAL" clId="{7FF4009E-7E0A-474D-9D1C-EDE0B6456BB9}" dt="2024-12-13T08:47:42.778" v="46" actId="20577"/>
-        <pc:sldMkLst>
-          <pc:docMk/>
-          <pc:sldMk cId="1536049848" sldId="347"/>
-        </pc:sldMkLst>
-      </pc:sldChg>
-      <pc:sldChg chg="modSp mod">
-        <pc:chgData name="MIGUEL TRIGUEROS MUÑOZ" userId="a4ee0321-97d7-430f-98a8-7ed13ff9a4bf" providerId="ADAL" clId="{7FF4009E-7E0A-474D-9D1C-EDE0B6456BB9}" dt="2024-12-13T08:48:58.078" v="203" actId="33524"/>
-        <pc:sldMkLst>
-          <pc:docMk/>
-          <pc:sldMk cId="2951450419" sldId="363"/>
-        </pc:sldMkLst>
-      </pc:sldChg>
-      <pc:sldChg chg="add del">
-        <pc:chgData name="MIGUEL TRIGUEROS MUÑOZ" userId="a4ee0321-97d7-430f-98a8-7ed13ff9a4bf" providerId="ADAL" clId="{7FF4009E-7E0A-474D-9D1C-EDE0B6456BB9}" dt="2024-12-13T08:47:14.449" v="18" actId="2696"/>
-        <pc:sldMkLst>
-          <pc:docMk/>
-          <pc:sldMk cId="941241975" sldId="364"/>
-        </pc:sldMkLst>
-      </pc:sldChg>
-    </pc:docChg>
-  </pc:docChgLst>
-  <pc:docChgLst>
-    <pc:chgData name="MIGUEL TRIGUEROS MUÑOZ" userId="S::miguel.trigueros@aulaxxi.murciaeduca.es::a4ee0321-97d7-430f-98a8-7ed13ff9a4bf" providerId="AD" clId="Web-{A96DD97C-90FA-8B42-AE93-F4D366C5FDA8}"/>
-    <pc:docChg chg="modSld sldOrd">
-      <pc:chgData name="MIGUEL TRIGUEROS MUÑOZ" userId="S::miguel.trigueros@aulaxxi.murciaeduca.es::a4ee0321-97d7-430f-98a8-7ed13ff9a4bf" providerId="AD" clId="Web-{A96DD97C-90FA-8B42-AE93-F4D366C5FDA8}" dt="2024-02-12T07:07:13.113" v="1"/>
-      <pc:docMkLst>
-        <pc:docMk/>
-      </pc:docMkLst>
-      <pc:sldChg chg="ord">
-        <pc:chgData name="MIGUEL TRIGUEROS MUÑOZ" userId="S::miguel.trigueros@aulaxxi.murciaeduca.es::a4ee0321-97d7-430f-98a8-7ed13ff9a4bf" providerId="AD" clId="Web-{A96DD97C-90FA-8B42-AE93-F4D366C5FDA8}" dt="2024-02-12T07:07:13.113" v="1"/>
-        <pc:sldMkLst>
-          <pc:docMk/>
-          <pc:sldMk cId="3289438449" sldId="318"/>
-        </pc:sldMkLst>
-      </pc:sldChg>
-      <pc:sldChg chg="modSp">
-        <pc:chgData name="MIGUEL TRIGUEROS MUÑOZ" userId="S::miguel.trigueros@aulaxxi.murciaeduca.es::a4ee0321-97d7-430f-98a8-7ed13ff9a4bf" providerId="AD" clId="Web-{A96DD97C-90FA-8B42-AE93-F4D366C5FDA8}" dt="2024-02-12T07:01:05.885" v="0" actId="1076"/>
+      <pc:sldChg chg="modSp mod modNotesTx">
+        <pc:chgData name="MIGUEL TRIGUEROS MUÑOZ" userId="a4ee0321-97d7-430f-98a8-7ed13ff9a4bf" providerId="ADAL" clId="{6EE8E80F-F211-4A9B-9011-A3407143D2A0}" dt="2026-01-16T07:55:57.967" v="129" actId="20577"/>
         <pc:sldMkLst>
           <pc:docMk/>
           <pc:sldMk cId="1059083778" sldId="319"/>
         </pc:sldMkLst>
+        <pc:graphicFrameChg chg="mod modGraphic">
+          <ac:chgData name="MIGUEL TRIGUEROS MUÑOZ" userId="a4ee0321-97d7-430f-98a8-7ed13ff9a4bf" providerId="ADAL" clId="{6EE8E80F-F211-4A9B-9011-A3407143D2A0}" dt="2026-01-16T07:55:57.967" v="129" actId="20577"/>
+          <ac:graphicFrameMkLst>
+            <pc:docMk/>
+            <pc:sldMk cId="1059083778" sldId="319"/>
+            <ac:graphicFrameMk id="5" creationId="{65DCCEED-BCD4-39ED-770E-C15625D2107B}"/>
+          </ac:graphicFrameMkLst>
+        </pc:graphicFrameChg>
       </pc:sldChg>
-    </pc:docChg>
-  </pc:docChgLst>
-  <pc:docChgLst>
-    <pc:chgData name="Miguel Trigueros Muñoz" userId="7753574ed83b4f98" providerId="LiveId" clId="{2F2F11DA-E17F-4203-A18A-7BD3C4FC5EFB}"/>
-    <pc:docChg chg="custSel modSld modMainMaster">
-      <pc:chgData name="Miguel Trigueros Muñoz" userId="7753574ed83b4f98" providerId="LiveId" clId="{2F2F11DA-E17F-4203-A18A-7BD3C4FC5EFB}" dt="2025-07-08T15:33:06.107" v="142" actId="20577"/>
-      <pc:docMkLst>
-        <pc:docMk/>
-      </pc:docMkLst>
-      <pc:sldChg chg="addSp delSp modSp mod">
-        <pc:chgData name="Miguel Trigueros Muñoz" userId="7753574ed83b4f98" providerId="LiveId" clId="{2F2F11DA-E17F-4203-A18A-7BD3C4FC5EFB}" dt="2025-07-08T14:54:25.096" v="40" actId="1076"/>
-        <pc:sldMkLst>
-          <pc:docMk/>
-          <pc:sldMk cId="308865771" sldId="256"/>
-        </pc:sldMkLst>
-        <pc:spChg chg="mod">
-          <ac:chgData name="Miguel Trigueros Muñoz" userId="7753574ed83b4f98" providerId="LiveId" clId="{2F2F11DA-E17F-4203-A18A-7BD3C4FC5EFB}" dt="2025-06-25T18:13:02.582" v="3" actId="20577"/>
-          <ac:spMkLst>
-            <pc:docMk/>
-            <pc:sldMk cId="308865771" sldId="256"/>
-            <ac:spMk id="2" creationId="{BB6B5ACD-B995-716B-F5F7-1C14289F141D}"/>
-          </ac:spMkLst>
-        </pc:spChg>
-        <pc:spChg chg="del">
-          <ac:chgData name="Miguel Trigueros Muñoz" userId="7753574ed83b4f98" providerId="LiveId" clId="{2F2F11DA-E17F-4203-A18A-7BD3C4FC5EFB}" dt="2025-07-08T12:19:47.927" v="14" actId="478"/>
-          <ac:spMkLst>
-            <pc:docMk/>
-            <pc:sldMk cId="308865771" sldId="256"/>
-            <ac:spMk id="7" creationId="{20AD6DD5-E1F6-64CE-2264-36D1A0206F5E}"/>
-          </ac:spMkLst>
-        </pc:spChg>
-        <pc:spChg chg="del mod">
-          <ac:chgData name="Miguel Trigueros Muñoz" userId="7753574ed83b4f98" providerId="LiveId" clId="{2F2F11DA-E17F-4203-A18A-7BD3C4FC5EFB}" dt="2025-07-08T12:20:10.036" v="17" actId="478"/>
-          <ac:spMkLst>
-            <pc:docMk/>
-            <pc:sldMk cId="308865771" sldId="256"/>
-            <ac:spMk id="8" creationId="{224F4294-9767-96BB-A7D3-EBFE8CEFC64B}"/>
-          </ac:spMkLst>
-        </pc:spChg>
-        <pc:spChg chg="mod">
-          <ac:chgData name="Miguel Trigueros Muñoz" userId="7753574ed83b4f98" providerId="LiveId" clId="{2F2F11DA-E17F-4203-A18A-7BD3C4FC5EFB}" dt="2025-07-08T12:19:50.908" v="15" actId="1076"/>
-          <ac:spMkLst>
-            <pc:docMk/>
-            <pc:sldMk cId="308865771" sldId="256"/>
-            <ac:spMk id="9" creationId="{163AF1D7-99DA-EAC5-BC03-9B1BE7C81353}"/>
-          </ac:spMkLst>
-        </pc:spChg>
-        <pc:spChg chg="del">
-          <ac:chgData name="Miguel Trigueros Muñoz" userId="7753574ed83b4f98" providerId="LiveId" clId="{2F2F11DA-E17F-4203-A18A-7BD3C4FC5EFB}" dt="2025-07-08T12:18:03.717" v="7" actId="478"/>
-          <ac:spMkLst>
-            <pc:docMk/>
-            <pc:sldMk cId="308865771" sldId="256"/>
-            <ac:spMk id="10" creationId="{BDA29F95-0454-BC18-A1E1-A0155EBFBD56}"/>
-          </ac:spMkLst>
-        </pc:spChg>
-        <pc:picChg chg="del mod">
-          <ac:chgData name="Miguel Trigueros Muñoz" userId="7753574ed83b4f98" providerId="LiveId" clId="{2F2F11DA-E17F-4203-A18A-7BD3C4FC5EFB}" dt="2025-07-08T12:18:03.717" v="7" actId="478"/>
-          <ac:picMkLst>
-            <pc:docMk/>
-            <pc:sldMk cId="308865771" sldId="256"/>
-            <ac:picMk id="6" creationId="{C50A11EA-2D32-AAAE-AE4D-4136143D20A9}"/>
-          </ac:picMkLst>
-        </pc:picChg>
-        <pc:picChg chg="add del mod">
-          <ac:chgData name="Miguel Trigueros Muñoz" userId="7753574ed83b4f98" providerId="LiveId" clId="{2F2F11DA-E17F-4203-A18A-7BD3C4FC5EFB}" dt="2025-07-08T14:54:12.231" v="35" actId="478"/>
-          <ac:picMkLst>
-            <pc:docMk/>
-            <pc:sldMk cId="308865771" sldId="256"/>
-            <ac:picMk id="11" creationId="{5FE3859D-C21C-4D46-BDB2-66343DC17895}"/>
-          </ac:picMkLst>
-        </pc:picChg>
-        <pc:picChg chg="add mod">
-          <ac:chgData name="Miguel Trigueros Muñoz" userId="7753574ed83b4f98" providerId="LiveId" clId="{2F2F11DA-E17F-4203-A18A-7BD3C4FC5EFB}" dt="2025-07-08T14:54:25.096" v="40" actId="1076"/>
-          <ac:picMkLst>
-            <pc:docMk/>
-            <pc:sldMk cId="308865771" sldId="256"/>
-            <ac:picMk id="13" creationId="{1E7AA01C-6518-4A8A-0624-7F557A2DF0C2}"/>
-          </ac:picMkLst>
-        </pc:picChg>
-      </pc:sldChg>
-      <pc:sldChg chg="modSp mod">
-        <pc:chgData name="Miguel Trigueros Muñoz" userId="7753574ed83b4f98" providerId="LiveId" clId="{2F2F11DA-E17F-4203-A18A-7BD3C4FC5EFB}" dt="2025-07-08T15:23:12.135" v="124" actId="1076"/>
-        <pc:sldMkLst>
-          <pc:docMk/>
-          <pc:sldMk cId="4205591290" sldId="324"/>
-        </pc:sldMkLst>
-        <pc:picChg chg="mod">
-          <ac:chgData name="Miguel Trigueros Muñoz" userId="7753574ed83b4f98" providerId="LiveId" clId="{2F2F11DA-E17F-4203-A18A-7BD3C4FC5EFB}" dt="2025-07-08T15:23:12.135" v="124" actId="1076"/>
-          <ac:picMkLst>
-            <pc:docMk/>
-            <pc:sldMk cId="4205591290" sldId="324"/>
-            <ac:picMk id="5" creationId="{BF57EE12-9491-7E47-10EC-A961DFCD36AE}"/>
-          </ac:picMkLst>
-        </pc:picChg>
-      </pc:sldChg>
-      <pc:sldChg chg="delSp modSp mod modClrScheme delAnim chgLayout">
-        <pc:chgData name="Miguel Trigueros Muñoz" userId="7753574ed83b4f98" providerId="LiveId" clId="{2F2F11DA-E17F-4203-A18A-7BD3C4FC5EFB}" dt="2025-07-08T15:22:49.043" v="123" actId="478"/>
-        <pc:sldMkLst>
-          <pc:docMk/>
-          <pc:sldMk cId="3317774778" sldId="325"/>
-        </pc:sldMkLst>
-        <pc:spChg chg="mod ord">
-          <ac:chgData name="Miguel Trigueros Muñoz" userId="7753574ed83b4f98" providerId="LiveId" clId="{2F2F11DA-E17F-4203-A18A-7BD3C4FC5EFB}" dt="2025-07-08T15:21:02.236" v="98" actId="20577"/>
-          <ac:spMkLst>
-            <pc:docMk/>
-            <pc:sldMk cId="3317774778" sldId="325"/>
-            <ac:spMk id="2" creationId="{252707BB-B390-514F-F117-3F51A96C85CC}"/>
-          </ac:spMkLst>
-        </pc:spChg>
-        <pc:spChg chg="mod ord">
-          <ac:chgData name="Miguel Trigueros Muñoz" userId="7753574ed83b4f98" providerId="LiveId" clId="{2F2F11DA-E17F-4203-A18A-7BD3C4FC5EFB}" dt="2025-07-08T15:20:54.781" v="86" actId="700"/>
-          <ac:spMkLst>
-            <pc:docMk/>
-            <pc:sldMk cId="3317774778" sldId="325"/>
-            <ac:spMk id="3" creationId="{BBD2C6B3-99D2-B9CC-5F50-ADD31ADFF127}"/>
-          </ac:spMkLst>
-        </pc:spChg>
-        <pc:spChg chg="del">
-          <ac:chgData name="Miguel Trigueros Muñoz" userId="7753574ed83b4f98" providerId="LiveId" clId="{2F2F11DA-E17F-4203-A18A-7BD3C4FC5EFB}" dt="2025-07-08T15:22:49.043" v="123" actId="478"/>
-          <ac:spMkLst>
-            <pc:docMk/>
-            <pc:sldMk cId="3317774778" sldId="325"/>
-            <ac:spMk id="8" creationId="{CC9B6D4C-5404-9FA6-D57F-29F56054AB10}"/>
-          </ac:spMkLst>
-        </pc:spChg>
-        <pc:spChg chg="mod ord">
-          <ac:chgData name="Miguel Trigueros Muñoz" userId="7753574ed83b4f98" providerId="LiveId" clId="{2F2F11DA-E17F-4203-A18A-7BD3C4FC5EFB}" dt="2025-07-08T15:20:54.781" v="86" actId="700"/>
-          <ac:spMkLst>
-            <pc:docMk/>
-            <pc:sldMk cId="3317774778" sldId="325"/>
-            <ac:spMk id="9" creationId="{29C1C492-6705-79FB-B531-66363C51640E}"/>
-          </ac:spMkLst>
-        </pc:spChg>
-        <pc:spChg chg="mod ord">
-          <ac:chgData name="Miguel Trigueros Muñoz" userId="7753574ed83b4f98" providerId="LiveId" clId="{2F2F11DA-E17F-4203-A18A-7BD3C4FC5EFB}" dt="2025-07-08T15:20:54.791" v="87" actId="27636"/>
-          <ac:spMkLst>
-            <pc:docMk/>
-            <pc:sldMk cId="3317774778" sldId="325"/>
-            <ac:spMk id="10" creationId="{20B17976-8479-97AC-95C8-BC61FD26426F}"/>
-          </ac:spMkLst>
-        </pc:spChg>
-      </pc:sldChg>
-      <pc:sldChg chg="modSp mod">
-        <pc:chgData name="Miguel Trigueros Muñoz" userId="7753574ed83b4f98" providerId="LiveId" clId="{2F2F11DA-E17F-4203-A18A-7BD3C4FC5EFB}" dt="2025-07-08T15:24:25.823" v="141" actId="20577"/>
+      <pc:sldChg chg="delSp modSp mod delAnim">
+        <pc:chgData name="MIGUEL TRIGUEROS MUÑOZ" userId="a4ee0321-97d7-430f-98a8-7ed13ff9a4bf" providerId="ADAL" clId="{6EE8E80F-F211-4A9B-9011-A3407143D2A0}" dt="2026-01-16T07:53:09.117" v="110" actId="20577"/>
         <pc:sldMkLst>
           <pc:docMk/>
           <pc:sldMk cId="94322529" sldId="326"/>
         </pc:sldMkLst>
         <pc:spChg chg="mod">
-          <ac:chgData name="Miguel Trigueros Muñoz" userId="7753574ed83b4f98" providerId="LiveId" clId="{2F2F11DA-E17F-4203-A18A-7BD3C4FC5EFB}" dt="2025-07-08T15:24:25.823" v="141" actId="20577"/>
+          <ac:chgData name="MIGUEL TRIGUEROS MUÑOZ" userId="a4ee0321-97d7-430f-98a8-7ed13ff9a4bf" providerId="ADAL" clId="{6EE8E80F-F211-4A9B-9011-A3407143D2A0}" dt="2026-01-16T07:52:18.216" v="105" actId="20577"/>
+          <ac:spMkLst>
+            <pc:docMk/>
+            <pc:sldMk cId="94322529" sldId="326"/>
+            <ac:spMk id="3" creationId="{BBD2C6B3-99D2-B9CC-5F50-ADD31ADFF127}"/>
+          </ac:spMkLst>
+        </pc:spChg>
+        <pc:spChg chg="del">
+          <ac:chgData name="MIGUEL TRIGUEROS MUÑOZ" userId="a4ee0321-97d7-430f-98a8-7ed13ff9a4bf" providerId="ADAL" clId="{6EE8E80F-F211-4A9B-9011-A3407143D2A0}" dt="2026-01-16T07:52:05.694" v="91" actId="478"/>
           <ac:spMkLst>
             <pc:docMk/>
             <pc:sldMk cId="94322529" sldId="326"/>
             <ac:spMk id="7" creationId="{96DD68C5-5195-6A44-79EA-78FA990B8EC6}"/>
           </ac:spMkLst>
         </pc:spChg>
-      </pc:sldChg>
-      <pc:sldChg chg="modSp mod">
-        <pc:chgData name="Miguel Trigueros Muñoz" userId="7753574ed83b4f98" providerId="LiveId" clId="{2F2F11DA-E17F-4203-A18A-7BD3C4FC5EFB}" dt="2025-06-25T18:13:53.155" v="4" actId="20577"/>
-        <pc:sldMkLst>
-          <pc:docMk/>
-          <pc:sldMk cId="1536049848" sldId="347"/>
-        </pc:sldMkLst>
         <pc:spChg chg="mod">
-          <ac:chgData name="Miguel Trigueros Muñoz" userId="7753574ed83b4f98" providerId="LiveId" clId="{2F2F11DA-E17F-4203-A18A-7BD3C4FC5EFB}" dt="2025-06-25T18:13:53.155" v="4" actId="20577"/>
+          <ac:chgData name="MIGUEL TRIGUEROS MUÑOZ" userId="a4ee0321-97d7-430f-98a8-7ed13ff9a4bf" providerId="ADAL" clId="{6EE8E80F-F211-4A9B-9011-A3407143D2A0}" dt="2026-01-16T07:53:09.117" v="110" actId="20577"/>
           <ac:spMkLst>
             <pc:docMk/>
-            <pc:sldMk cId="1536049848" sldId="347"/>
-            <ac:spMk id="2" creationId="{C67B4903-AC98-F31D-0610-6FD4789F2717}"/>
+            <pc:sldMk cId="94322529" sldId="326"/>
+            <ac:spMk id="9" creationId="{45C11F8F-C291-F98A-45CD-CE12FC75D86A}"/>
           </ac:spMkLst>
         </pc:spChg>
       </pc:sldChg>
-      <pc:sldChg chg="delSp modSp mod modClrScheme delAnim chgLayout">
-        <pc:chgData name="Miguel Trigueros Muñoz" userId="7753574ed83b4f98" providerId="LiveId" clId="{2F2F11DA-E17F-4203-A18A-7BD3C4FC5EFB}" dt="2025-07-08T15:33:06.107" v="142" actId="20577"/>
+      <pc:sldChg chg="modSp mod modCm modNotesTx">
+        <pc:chgData name="MIGUEL TRIGUEROS MUÑOZ" userId="a4ee0321-97d7-430f-98a8-7ed13ff9a4bf" providerId="ADAL" clId="{6EE8E80F-F211-4A9B-9011-A3407143D2A0}" dt="2026-01-16T08:15:16.023" v="135" actId="1076"/>
         <pc:sldMkLst>
           <pc:docMk/>
           <pc:sldMk cId="3660112489" sldId="357"/>
         </pc:sldMkLst>
-        <pc:spChg chg="mod ord">
-          <ac:chgData name="Miguel Trigueros Muñoz" userId="7753574ed83b4f98" providerId="LiveId" clId="{2F2F11DA-E17F-4203-A18A-7BD3C4FC5EFB}" dt="2025-07-08T15:33:06.107" v="142" actId="20577"/>
-          <ac:spMkLst>
-            <pc:docMk/>
-            <pc:sldMk cId="3660112489" sldId="357"/>
-            <ac:spMk id="2" creationId="{1B63BACD-C8D6-6855-4775-D328EA4CC1F7}"/>
-          </ac:spMkLst>
-        </pc:spChg>
-        <pc:spChg chg="mod ord">
-          <ac:chgData name="Miguel Trigueros Muñoz" userId="7753574ed83b4f98" providerId="LiveId" clId="{2F2F11DA-E17F-4203-A18A-7BD3C4FC5EFB}" dt="2025-07-08T15:19:55.283" v="55" actId="700"/>
+        <pc:spChg chg="mod">
+          <ac:chgData name="MIGUEL TRIGUEROS MUÑOZ" userId="a4ee0321-97d7-430f-98a8-7ed13ff9a4bf" providerId="ADAL" clId="{6EE8E80F-F211-4A9B-9011-A3407143D2A0}" dt="2026-01-16T08:14:56.766" v="134" actId="20577"/>
           <ac:spMkLst>
             <pc:docMk/>
             <pc:sldMk cId="3660112489" sldId="357"/>
             <ac:spMk id="3" creationId="{DE2F0576-162F-3C0A-632E-17C18C273623}"/>
           </ac:spMkLst>
         </pc:spChg>
-        <pc:spChg chg="mod ord">
-          <ac:chgData name="Miguel Trigueros Muñoz" userId="7753574ed83b4f98" providerId="LiveId" clId="{2F2F11DA-E17F-4203-A18A-7BD3C4FC5EFB}" dt="2025-07-08T15:19:55.283" v="55" actId="700"/>
-          <ac:spMkLst>
+        <pc:picChg chg="mod">
+          <ac:chgData name="MIGUEL TRIGUEROS MUÑOZ" userId="a4ee0321-97d7-430f-98a8-7ed13ff9a4bf" providerId="ADAL" clId="{6EE8E80F-F211-4A9B-9011-A3407143D2A0}" dt="2026-01-16T08:15:16.023" v="135" actId="1076"/>
+          <ac:picMkLst>
             <pc:docMk/>
             <pc:sldMk cId="3660112489" sldId="357"/>
-            <ac:spMk id="7" creationId="{049D4588-4925-748C-583F-8C4C70EAF616}"/>
-          </ac:spMkLst>
-        </pc:spChg>
-        <pc:spChg chg="mod ord">
-          <ac:chgData name="Miguel Trigueros Muñoz" userId="7753574ed83b4f98" providerId="LiveId" clId="{2F2F11DA-E17F-4203-A18A-7BD3C4FC5EFB}" dt="2025-07-08T15:19:55.298" v="56" actId="27636"/>
-          <ac:spMkLst>
-            <pc:docMk/>
-            <pc:sldMk cId="3660112489" sldId="357"/>
-            <ac:spMk id="8" creationId="{B25FC02E-D149-59B0-4830-21911B123684}"/>
-          </ac:spMkLst>
-        </pc:spChg>
-        <pc:spChg chg="del">
-          <ac:chgData name="Miguel Trigueros Muñoz" userId="7753574ed83b4f98" providerId="LiveId" clId="{2F2F11DA-E17F-4203-A18A-7BD3C4FC5EFB}" dt="2025-07-08T15:19:59.755" v="57" actId="478"/>
-          <ac:spMkLst>
-            <pc:docMk/>
-            <pc:sldMk cId="3660112489" sldId="357"/>
-            <ac:spMk id="9" creationId="{38CF3787-C75E-E9DB-447E-3C5807D270E9}"/>
-          </ac:spMkLst>
-        </pc:spChg>
-      </pc:sldChg>
-      <pc:sldChg chg="modSp mod modClrScheme chgLayout">
-        <pc:chgData name="Miguel Trigueros Muñoz" userId="7753574ed83b4f98" providerId="LiveId" clId="{2F2F11DA-E17F-4203-A18A-7BD3C4FC5EFB}" dt="2025-07-08T15:19:44.703" v="54" actId="20577"/>
-        <pc:sldMkLst>
-          <pc:docMk/>
-          <pc:sldMk cId="3427303393" sldId="358"/>
-        </pc:sldMkLst>
-        <pc:spChg chg="mod ord">
-          <ac:chgData name="Miguel Trigueros Muñoz" userId="7753574ed83b4f98" providerId="LiveId" clId="{2F2F11DA-E17F-4203-A18A-7BD3C4FC5EFB}" dt="2025-07-08T15:19:44.703" v="54" actId="20577"/>
-          <ac:spMkLst>
-            <pc:docMk/>
-            <pc:sldMk cId="3427303393" sldId="358"/>
-            <ac:spMk id="2" creationId="{4A9311A6-C1CD-5D21-C97E-B79BB3616598}"/>
-          </ac:spMkLst>
-        </pc:spChg>
-        <pc:spChg chg="mod ord">
-          <ac:chgData name="Miguel Trigueros Muñoz" userId="7753574ed83b4f98" providerId="LiveId" clId="{2F2F11DA-E17F-4203-A18A-7BD3C4FC5EFB}" dt="2025-07-08T15:19:21.995" v="41" actId="700"/>
-          <ac:spMkLst>
-            <pc:docMk/>
-            <pc:sldMk cId="3427303393" sldId="358"/>
-            <ac:spMk id="4" creationId="{FE52A55E-C7CF-11CD-E4C7-88D21426992B}"/>
-          </ac:spMkLst>
-        </pc:spChg>
-        <pc:spChg chg="mod ord">
-          <ac:chgData name="Miguel Trigueros Muñoz" userId="7753574ed83b4f98" providerId="LiveId" clId="{2F2F11DA-E17F-4203-A18A-7BD3C4FC5EFB}" dt="2025-07-08T15:19:21.995" v="41" actId="700"/>
-          <ac:spMkLst>
-            <pc:docMk/>
-            <pc:sldMk cId="3427303393" sldId="358"/>
-            <ac:spMk id="6" creationId="{D513272A-9903-9091-7A3C-2A0C00443A38}"/>
-          </ac:spMkLst>
-        </pc:spChg>
-      </pc:sldChg>
-      <pc:sldChg chg="modSp mod">
-        <pc:chgData name="Miguel Trigueros Muñoz" userId="7753574ed83b4f98" providerId="LiveId" clId="{2F2F11DA-E17F-4203-A18A-7BD3C4FC5EFB}" dt="2025-07-08T15:23:25.370" v="125" actId="1076"/>
-        <pc:sldMkLst>
-          <pc:docMk/>
-          <pc:sldMk cId="2538212918" sldId="359"/>
-        </pc:sldMkLst>
-        <pc:picChg chg="mod">
-          <ac:chgData name="Miguel Trigueros Muñoz" userId="7753574ed83b4f98" providerId="LiveId" clId="{2F2F11DA-E17F-4203-A18A-7BD3C4FC5EFB}" dt="2025-07-08T15:23:25.370" v="125" actId="1076"/>
-          <ac:picMkLst>
-            <pc:docMk/>
-            <pc:sldMk cId="2538212918" sldId="359"/>
-            <ac:picMk id="9" creationId="{9A95E1D8-A1B0-09F0-D367-AA371A51BD2A}"/>
+            <ac:picMk id="11" creationId="{C68AC37E-0724-35F4-7EF0-58F863FECBA9}"/>
           </ac:picMkLst>
         </pc:picChg>
-      </pc:sldChg>
-      <pc:sldChg chg="modSp mod modNotesTx">
-        <pc:chgData name="Miguel Trigueros Muñoz" userId="7753574ed83b4f98" providerId="LiveId" clId="{2F2F11DA-E17F-4203-A18A-7BD3C4FC5EFB}" dt="2025-07-08T12:23:31.479" v="34" actId="1076"/>
-        <pc:sldMkLst>
-          <pc:docMk/>
-          <pc:sldMk cId="2860104298" sldId="360"/>
-        </pc:sldMkLst>
-        <pc:spChg chg="mod">
-          <ac:chgData name="Miguel Trigueros Muñoz" userId="7753574ed83b4f98" providerId="LiveId" clId="{2F2F11DA-E17F-4203-A18A-7BD3C4FC5EFB}" dt="2025-07-08T12:23:31.479" v="34" actId="1076"/>
-          <ac:spMkLst>
-            <pc:docMk/>
-            <pc:sldMk cId="2860104298" sldId="360"/>
-            <ac:spMk id="3" creationId="{331446BA-08D9-2950-571A-7AA118878FDC}"/>
-          </ac:spMkLst>
-        </pc:spChg>
-      </pc:sldChg>
-      <pc:sldChg chg="modSp mod">
-        <pc:chgData name="Miguel Trigueros Muñoz" userId="7753574ed83b4f98" providerId="LiveId" clId="{2F2F11DA-E17F-4203-A18A-7BD3C4FC5EFB}" dt="2025-07-08T12:20:56.787" v="22" actId="14100"/>
-        <pc:sldMkLst>
-          <pc:docMk/>
-          <pc:sldMk cId="2951450419" sldId="363"/>
-        </pc:sldMkLst>
-        <pc:spChg chg="mod">
-          <ac:chgData name="Miguel Trigueros Muñoz" userId="7753574ed83b4f98" providerId="LiveId" clId="{2F2F11DA-E17F-4203-A18A-7BD3C4FC5EFB}" dt="2025-07-08T12:20:56.787" v="22" actId="14100"/>
-          <ac:spMkLst>
-            <pc:docMk/>
-            <pc:sldMk cId="2951450419" sldId="363"/>
-            <ac:spMk id="4" creationId="{88DE08A4-98F8-00AB-DECB-9810D4ECFE7A}"/>
-          </ac:spMkLst>
-        </pc:spChg>
-      </pc:sldChg>
-      <pc:sldChg chg="modSp mod modClrScheme chgLayout">
-        <pc:chgData name="Miguel Trigueros Muñoz" userId="7753574ed83b4f98" providerId="LiveId" clId="{2F2F11DA-E17F-4203-A18A-7BD3C4FC5EFB}" dt="2025-07-08T15:22:31.801" v="122" actId="20577"/>
-        <pc:sldMkLst>
-          <pc:docMk/>
-          <pc:sldMk cId="3422367261" sldId="365"/>
-        </pc:sldMkLst>
-        <pc:spChg chg="mod ord">
-          <ac:chgData name="Miguel Trigueros Muñoz" userId="7753574ed83b4f98" providerId="LiveId" clId="{2F2F11DA-E17F-4203-A18A-7BD3C4FC5EFB}" dt="2025-07-08T15:22:31.801" v="122" actId="20577"/>
-          <ac:spMkLst>
-            <pc:docMk/>
-            <pc:sldMk cId="3422367261" sldId="365"/>
-            <ac:spMk id="2" creationId="{0F95D9BF-2CF4-CACF-7AEE-2257411BFAA5}"/>
-          </ac:spMkLst>
-        </pc:spChg>
-        <pc:spChg chg="mod ord">
-          <ac:chgData name="Miguel Trigueros Muñoz" userId="7753574ed83b4f98" providerId="LiveId" clId="{2F2F11DA-E17F-4203-A18A-7BD3C4FC5EFB}" dt="2025-07-08T15:22:21.052" v="113" actId="700"/>
-          <ac:spMkLst>
-            <pc:docMk/>
-            <pc:sldMk cId="3422367261" sldId="365"/>
-            <ac:spMk id="3" creationId="{D467753D-0977-74A5-94C4-109F495F4356}"/>
-          </ac:spMkLst>
-        </pc:spChg>
-        <pc:spChg chg="mod ord">
-          <ac:chgData name="Miguel Trigueros Muñoz" userId="7753574ed83b4f98" providerId="LiveId" clId="{2F2F11DA-E17F-4203-A18A-7BD3C4FC5EFB}" dt="2025-07-08T15:22:21.052" v="113" actId="700"/>
-          <ac:spMkLst>
-            <pc:docMk/>
-            <pc:sldMk cId="3422367261" sldId="365"/>
-            <ac:spMk id="6" creationId="{89F7171E-23FB-17CF-6FAC-144F1E6C1296}"/>
-          </ac:spMkLst>
-        </pc:spChg>
-      </pc:sldChg>
-      <pc:sldChg chg="modSp mod modClrScheme chgLayout">
-        <pc:chgData name="Miguel Trigueros Muñoz" userId="7753574ed83b4f98" providerId="LiveId" clId="{2F2F11DA-E17F-4203-A18A-7BD3C4FC5EFB}" dt="2025-07-08T15:21:28.886" v="100" actId="21"/>
-        <pc:sldMkLst>
-          <pc:docMk/>
-          <pc:sldMk cId="3839625751" sldId="368"/>
-        </pc:sldMkLst>
-        <pc:spChg chg="mod ord">
-          <ac:chgData name="Miguel Trigueros Muñoz" userId="7753574ed83b4f98" providerId="LiveId" clId="{2F2F11DA-E17F-4203-A18A-7BD3C4FC5EFB}" dt="2025-07-08T15:21:28.886" v="100" actId="21"/>
-          <ac:spMkLst>
-            <pc:docMk/>
-            <pc:sldMk cId="3839625751" sldId="368"/>
-            <ac:spMk id="2" creationId="{593ACAD9-B992-8A71-B310-568EA3DF4286}"/>
-          </ac:spMkLst>
-        </pc:spChg>
-        <pc:spChg chg="mod ord">
-          <ac:chgData name="Miguel Trigueros Muñoz" userId="7753574ed83b4f98" providerId="LiveId" clId="{2F2F11DA-E17F-4203-A18A-7BD3C4FC5EFB}" dt="2025-07-08T15:21:23.646" v="99" actId="700"/>
-          <ac:spMkLst>
-            <pc:docMk/>
-            <pc:sldMk cId="3839625751" sldId="368"/>
-            <ac:spMk id="3" creationId="{99C15D02-7E17-CF17-2D86-E2D3C9356BF0}"/>
-          </ac:spMkLst>
-        </pc:spChg>
-        <pc:spChg chg="mod ord">
-          <ac:chgData name="Miguel Trigueros Muñoz" userId="7753574ed83b4f98" providerId="LiveId" clId="{2F2F11DA-E17F-4203-A18A-7BD3C4FC5EFB}" dt="2025-07-08T15:21:23.646" v="99" actId="700"/>
-          <ac:spMkLst>
-            <pc:docMk/>
-            <pc:sldMk cId="3839625751" sldId="368"/>
-            <ac:spMk id="4" creationId="{716533DA-5C83-3C28-D7F7-690247246C86}"/>
-          </ac:spMkLst>
-        </pc:spChg>
-        <pc:spChg chg="mod ord">
-          <ac:chgData name="Miguel Trigueros Muñoz" userId="7753574ed83b4f98" providerId="LiveId" clId="{2F2F11DA-E17F-4203-A18A-7BD3C4FC5EFB}" dt="2025-07-08T15:21:23.646" v="99" actId="700"/>
-          <ac:spMkLst>
-            <pc:docMk/>
-            <pc:sldMk cId="3839625751" sldId="368"/>
-            <ac:spMk id="8" creationId="{AB46B6A1-3332-1D84-C225-F85A947F62E7}"/>
-          </ac:spMkLst>
-        </pc:spChg>
-      </pc:sldChg>
-      <pc:sldChg chg="modSp mod modClrScheme chgLayout">
-        <pc:chgData name="Miguel Trigueros Muñoz" userId="7753574ed83b4f98" providerId="LiveId" clId="{2F2F11DA-E17F-4203-A18A-7BD3C4FC5EFB}" dt="2025-07-08T15:21:49.271" v="112"/>
-        <pc:sldMkLst>
-          <pc:docMk/>
-          <pc:sldMk cId="3715628655" sldId="369"/>
-        </pc:sldMkLst>
-        <pc:spChg chg="mod ord">
-          <ac:chgData name="Miguel Trigueros Muñoz" userId="7753574ed83b4f98" providerId="LiveId" clId="{2F2F11DA-E17F-4203-A18A-7BD3C4FC5EFB}" dt="2025-07-08T15:21:49.271" v="112"/>
-          <ac:spMkLst>
-            <pc:docMk/>
-            <pc:sldMk cId="3715628655" sldId="369"/>
-            <ac:spMk id="2" creationId="{C12D0375-A78F-719E-C31A-F200343A3291}"/>
-          </ac:spMkLst>
-        </pc:spChg>
-        <pc:spChg chg="mod ord">
-          <ac:chgData name="Miguel Trigueros Muñoz" userId="7753574ed83b4f98" providerId="LiveId" clId="{2F2F11DA-E17F-4203-A18A-7BD3C4FC5EFB}" dt="2025-07-08T15:21:43.370" v="101" actId="700"/>
-          <ac:spMkLst>
-            <pc:docMk/>
-            <pc:sldMk cId="3715628655" sldId="369"/>
-            <ac:spMk id="3" creationId="{AE4BE8C0-929F-0460-0020-BFF4B02F6DC7}"/>
-          </ac:spMkLst>
-        </pc:spChg>
-        <pc:spChg chg="mod ord">
-          <ac:chgData name="Miguel Trigueros Muñoz" userId="7753574ed83b4f98" providerId="LiveId" clId="{2F2F11DA-E17F-4203-A18A-7BD3C4FC5EFB}" dt="2025-07-08T15:21:43.387" v="102" actId="27636"/>
-          <ac:spMkLst>
-            <pc:docMk/>
-            <pc:sldMk cId="3715628655" sldId="369"/>
-            <ac:spMk id="4" creationId="{F3C5B4FE-3FA0-95C2-D044-28AEDD4B357C}"/>
-          </ac:spMkLst>
-        </pc:spChg>
-        <pc:spChg chg="mod ord">
-          <ac:chgData name="Miguel Trigueros Muñoz" userId="7753574ed83b4f98" providerId="LiveId" clId="{2F2F11DA-E17F-4203-A18A-7BD3C4FC5EFB}" dt="2025-07-08T15:21:43.370" v="101" actId="700"/>
-          <ac:spMkLst>
-            <pc:docMk/>
-            <pc:sldMk cId="3715628655" sldId="369"/>
-            <ac:spMk id="8" creationId="{8F755F9C-D396-BD49-0B30-BDBC8C720973}"/>
-          </ac:spMkLst>
-        </pc:spChg>
-      </pc:sldChg>
-      <pc:sldMasterChg chg="modSp mod">
-        <pc:chgData name="Miguel Trigueros Muñoz" userId="7753574ed83b4f98" providerId="LiveId" clId="{2F2F11DA-E17F-4203-A18A-7BD3C4FC5EFB}" dt="2025-07-08T12:20:39.134" v="19" actId="20577"/>
-        <pc:sldMasterMkLst>
-          <pc:docMk/>
-          <pc:sldMasterMk cId="455763939" sldId="2147483686"/>
-        </pc:sldMasterMkLst>
-        <pc:spChg chg="mod">
-          <ac:chgData name="Miguel Trigueros Muñoz" userId="7753574ed83b4f98" providerId="LiveId" clId="{2F2F11DA-E17F-4203-A18A-7BD3C4FC5EFB}" dt="2025-07-08T12:20:39.134" v="19" actId="20577"/>
-          <ac:spMkLst>
-            <pc:docMk/>
-            <pc:sldMasterMk cId="455763939" sldId="2147483686"/>
-            <ac:spMk id="18" creationId="{F589B1CF-02D4-4456-3BF5-4299A2F5FF62}"/>
-          </ac:spMkLst>
-        </pc:spChg>
-      </pc:sldMasterChg>
-    </pc:docChg>
-  </pc:docChgLst>
-  <pc:docChgLst>
-    <pc:chgData name="MIGUEL TRIGUEROS MUÑOZ" userId="a4ee0321-97d7-430f-98a8-7ed13ff9a4bf" providerId="ADAL" clId="{5B3B6A0D-D067-4D34-8631-91ABF30A2C5B}"/>
-    <pc:docChg chg="undo redo custSel addSld delSld modSld sldOrd modSection">
-      <pc:chgData name="MIGUEL TRIGUEROS MUÑOZ" userId="a4ee0321-97d7-430f-98a8-7ed13ff9a4bf" providerId="ADAL" clId="{5B3B6A0D-D067-4D34-8631-91ABF30A2C5B}" dt="2024-03-10T08:21:10.022" v="5251"/>
-      <pc:docMkLst>
-        <pc:docMk/>
-      </pc:docMkLst>
-      <pc:sldChg chg="modSp mod">
-        <pc:chgData name="MIGUEL TRIGUEROS MUÑOZ" userId="a4ee0321-97d7-430f-98a8-7ed13ff9a4bf" providerId="ADAL" clId="{5B3B6A0D-D067-4D34-8631-91ABF30A2C5B}" dt="2024-02-24T08:17:48.623" v="1591" actId="1076"/>
-        <pc:sldMkLst>
-          <pc:docMk/>
-          <pc:sldMk cId="2154345873" sldId="317"/>
-        </pc:sldMkLst>
-      </pc:sldChg>
-      <pc:sldChg chg="addSp delSp mod">
-        <pc:chgData name="MIGUEL TRIGUEROS MUÑOZ" userId="a4ee0321-97d7-430f-98a8-7ed13ff9a4bf" providerId="ADAL" clId="{5B3B6A0D-D067-4D34-8631-91ABF30A2C5B}" dt="2024-03-03T10:29:14.906" v="4512" actId="478"/>
-        <pc:sldMkLst>
-          <pc:docMk/>
-          <pc:sldMk cId="675174442" sldId="322"/>
-        </pc:sldMkLst>
-      </pc:sldChg>
-      <pc:sldChg chg="addSp modSp mod modAnim modNotesTx">
-        <pc:chgData name="MIGUEL TRIGUEROS MUÑOZ" userId="a4ee0321-97d7-430f-98a8-7ed13ff9a4bf" providerId="ADAL" clId="{5B3B6A0D-D067-4D34-8631-91ABF30A2C5B}" dt="2024-02-26T08:58:03.651" v="2324" actId="20577"/>
-        <pc:sldMkLst>
-          <pc:docMk/>
-          <pc:sldMk cId="4268188109" sldId="323"/>
-        </pc:sldMkLst>
-      </pc:sldChg>
-      <pc:sldChg chg="addSp modSp mod">
-        <pc:chgData name="MIGUEL TRIGUEROS MUÑOZ" userId="a4ee0321-97d7-430f-98a8-7ed13ff9a4bf" providerId="ADAL" clId="{5B3B6A0D-D067-4D34-8631-91ABF30A2C5B}" dt="2024-02-25T11:24:55.484" v="2100" actId="1076"/>
-        <pc:sldMkLst>
-          <pc:docMk/>
-          <pc:sldMk cId="4205591290" sldId="324"/>
-        </pc:sldMkLst>
-      </pc:sldChg>
-      <pc:sldChg chg="modSp">
-        <pc:chgData name="MIGUEL TRIGUEROS MUÑOZ" userId="a4ee0321-97d7-430f-98a8-7ed13ff9a4bf" providerId="ADAL" clId="{5B3B6A0D-D067-4D34-8631-91ABF30A2C5B}" dt="2024-02-25T11:21:01.043" v="2088" actId="13926"/>
-        <pc:sldMkLst>
-          <pc:docMk/>
-          <pc:sldMk cId="3317774778" sldId="325"/>
-        </pc:sldMkLst>
-      </pc:sldChg>
-      <pc:sldChg chg="addSp modSp mod modAnim modNotesTx">
-        <pc:chgData name="MIGUEL TRIGUEROS MUÑOZ" userId="a4ee0321-97d7-430f-98a8-7ed13ff9a4bf" providerId="ADAL" clId="{5B3B6A0D-D067-4D34-8631-91ABF30A2C5B}" dt="2024-03-06T12:48:47.893" v="5249" actId="114"/>
-        <pc:sldMkLst>
-          <pc:docMk/>
-          <pc:sldMk cId="2044085444" sldId="327"/>
-        </pc:sldMkLst>
-      </pc:sldChg>
-      <pc:sldChg chg="addSp delSp modSp mod">
-        <pc:chgData name="MIGUEL TRIGUEROS MUÑOZ" userId="a4ee0321-97d7-430f-98a8-7ed13ff9a4bf" providerId="ADAL" clId="{5B3B6A0D-D067-4D34-8631-91ABF30A2C5B}" dt="2024-03-04T08:44:09.684" v="4646" actId="255"/>
-        <pc:sldMkLst>
-          <pc:docMk/>
-          <pc:sldMk cId="155112023" sldId="328"/>
-        </pc:sldMkLst>
-      </pc:sldChg>
-      <pc:sldChg chg="addSp modSp mod">
-        <pc:chgData name="MIGUEL TRIGUEROS MUÑOZ" userId="a4ee0321-97d7-430f-98a8-7ed13ff9a4bf" providerId="ADAL" clId="{5B3B6A0D-D067-4D34-8631-91ABF30A2C5B}" dt="2024-02-29T08:17:33.773" v="2676" actId="1076"/>
-        <pc:sldMkLst>
-          <pc:docMk/>
-          <pc:sldMk cId="1498135890" sldId="329"/>
-        </pc:sldMkLst>
-      </pc:sldChg>
-      <pc:sldChg chg="addSp modSp mod">
-        <pc:chgData name="MIGUEL TRIGUEROS MUÑOZ" userId="a4ee0321-97d7-430f-98a8-7ed13ff9a4bf" providerId="ADAL" clId="{5B3B6A0D-D067-4D34-8631-91ABF30A2C5B}" dt="2024-02-29T08:18:34.383" v="2679" actId="1076"/>
-        <pc:sldMkLst>
-          <pc:docMk/>
-          <pc:sldMk cId="385184565" sldId="330"/>
-        </pc:sldMkLst>
-      </pc:sldChg>
-      <pc:sldChg chg="addSp modSp mod">
-        <pc:chgData name="MIGUEL TRIGUEROS MUÑOZ" userId="a4ee0321-97d7-430f-98a8-7ed13ff9a4bf" providerId="ADAL" clId="{5B3B6A0D-D067-4D34-8631-91ABF30A2C5B}" dt="2024-02-29T08:18:54.828" v="2682" actId="1076"/>
-        <pc:sldMkLst>
-          <pc:docMk/>
-          <pc:sldMk cId="3659872342" sldId="332"/>
-        </pc:sldMkLst>
-      </pc:sldChg>
-      <pc:sldChg chg="modSp mod addCm">
-        <pc:chgData name="MIGUEL TRIGUEROS MUÑOZ" userId="a4ee0321-97d7-430f-98a8-7ed13ff9a4bf" providerId="ADAL" clId="{5B3B6A0D-D067-4D34-8631-91ABF30A2C5B}" dt="2024-03-10T08:21:10.022" v="5251"/>
-        <pc:sldMkLst>
-          <pc:docMk/>
-          <pc:sldMk cId="952270227" sldId="333"/>
-        </pc:sldMkLst>
         <pc:extLst>
           <p:ext xmlns:p="http://schemas.openxmlformats.org/presentationml/2006/main" uri="{D6D511B9-2390-475A-947B-AFAB55BFBCF1}">
-            <pc226:cmChg xmlns:pc226="http://schemas.microsoft.com/office/powerpoint/2022/06/main/command" chg="add">
-              <pc226:chgData name="MIGUEL TRIGUEROS MUÑOZ" userId="a4ee0321-97d7-430f-98a8-7ed13ff9a4bf" providerId="ADAL" clId="{5B3B6A0D-D067-4D34-8631-91ABF30A2C5B}" dt="2024-03-10T08:21:10.022" v="5251"/>
+            <pc226:cmChg xmlns:pc226="http://schemas.microsoft.com/office/powerpoint/2022/06/main/command" chg="mod">
+              <pc226:chgData name="MIGUEL TRIGUEROS MUÑOZ" userId="a4ee0321-97d7-430f-98a8-7ed13ff9a4bf" providerId="ADAL" clId="{6EE8E80F-F211-4A9B-9011-A3407143D2A0}" dt="2026-01-16T08:14:56.766" v="134" actId="20577"/>
               <pc2:cmMkLst xmlns:pc2="http://schemas.microsoft.com/office/powerpoint/2019/9/main/command">
                 <pc:docMk/>
-                <pc:sldMk cId="952270227" sldId="333"/>
-                <pc2:cmMk id="{3136CD74-42C5-4D17-ACF1-463C6CA295D3}"/>
+                <pc:sldMk cId="3660112489" sldId="357"/>
+                <pc2:cmMk id="{26C9D192-75C6-47C6-9662-2C285A4C1C5A}"/>
               </pc2:cmMkLst>
             </pc226:cmChg>
           </p:ext>
         </pc:extLst>
       </pc:sldChg>
-      <pc:sldChg chg="modSp del mod">
-        <pc:chgData name="MIGUEL TRIGUEROS MUÑOZ" userId="a4ee0321-97d7-430f-98a8-7ed13ff9a4bf" providerId="ADAL" clId="{5B3B6A0D-D067-4D34-8631-91ABF30A2C5B}" dt="2024-03-10T06:05:28.552" v="5250" actId="47"/>
-        <pc:sldMkLst>
-          <pc:docMk/>
-          <pc:sldMk cId="3289902073" sldId="334"/>
-        </pc:sldMkLst>
-      </pc:sldChg>
-      <pc:sldChg chg="addSp delSp modSp del mod">
-        <pc:chgData name="MIGUEL TRIGUEROS MUÑOZ" userId="a4ee0321-97d7-430f-98a8-7ed13ff9a4bf" providerId="ADAL" clId="{5B3B6A0D-D067-4D34-8631-91ABF30A2C5B}" dt="2024-03-10T06:05:28.552" v="5250" actId="47"/>
-        <pc:sldMkLst>
-          <pc:docMk/>
-          <pc:sldMk cId="2360361628" sldId="335"/>
-        </pc:sldMkLst>
-      </pc:sldChg>
-      <pc:sldChg chg="modSp del mod">
-        <pc:chgData name="MIGUEL TRIGUEROS MUÑOZ" userId="a4ee0321-97d7-430f-98a8-7ed13ff9a4bf" providerId="ADAL" clId="{5B3B6A0D-D067-4D34-8631-91ABF30A2C5B}" dt="2024-03-10T06:05:28.552" v="5250" actId="47"/>
-        <pc:sldMkLst>
-          <pc:docMk/>
-          <pc:sldMk cId="270283012" sldId="336"/>
-        </pc:sldMkLst>
-      </pc:sldChg>
-      <pc:sldChg chg="addSp delSp modSp del mod setBg addAnim delAnim">
-        <pc:chgData name="MIGUEL TRIGUEROS MUÑOZ" userId="a4ee0321-97d7-430f-98a8-7ed13ff9a4bf" providerId="ADAL" clId="{5B3B6A0D-D067-4D34-8631-91ABF30A2C5B}" dt="2024-03-10T06:05:28.552" v="5250" actId="47"/>
-        <pc:sldMkLst>
-          <pc:docMk/>
-          <pc:sldMk cId="3066266296" sldId="337"/>
-        </pc:sldMkLst>
-      </pc:sldChg>
-      <pc:sldChg chg="addSp delSp modSp del mod">
-        <pc:chgData name="MIGUEL TRIGUEROS MUÑOZ" userId="a4ee0321-97d7-430f-98a8-7ed13ff9a4bf" providerId="ADAL" clId="{5B3B6A0D-D067-4D34-8631-91ABF30A2C5B}" dt="2024-03-10T06:05:28.552" v="5250" actId="47"/>
-        <pc:sldMkLst>
-          <pc:docMk/>
-          <pc:sldMk cId="2443124605" sldId="338"/>
-        </pc:sldMkLst>
-      </pc:sldChg>
-      <pc:sldChg chg="addSp delSp modSp del mod modNotesTx">
-        <pc:chgData name="MIGUEL TRIGUEROS MUÑOZ" userId="a4ee0321-97d7-430f-98a8-7ed13ff9a4bf" providerId="ADAL" clId="{5B3B6A0D-D067-4D34-8631-91ABF30A2C5B}" dt="2024-03-10T06:05:28.552" v="5250" actId="47"/>
-        <pc:sldMkLst>
-          <pc:docMk/>
-          <pc:sldMk cId="2088097569" sldId="339"/>
-        </pc:sldMkLst>
-      </pc:sldChg>
-      <pc:sldChg chg="addSp delSp modSp mod">
-        <pc:chgData name="MIGUEL TRIGUEROS MUÑOZ" userId="a4ee0321-97d7-430f-98a8-7ed13ff9a4bf" providerId="ADAL" clId="{5B3B6A0D-D067-4D34-8631-91ABF30A2C5B}" dt="2024-02-29T07:48:17.428" v="2601" actId="2085"/>
-        <pc:sldMkLst>
-          <pc:docMk/>
-          <pc:sldMk cId="2896794478" sldId="348"/>
-        </pc:sldMkLst>
-      </pc:sldChg>
-      <pc:sldChg chg="modSp mod">
-        <pc:chgData name="MIGUEL TRIGUEROS MUÑOZ" userId="a4ee0321-97d7-430f-98a8-7ed13ff9a4bf" providerId="ADAL" clId="{5B3B6A0D-D067-4D34-8631-91ABF30A2C5B}" dt="2024-02-19T10:04:57.768" v="413" actId="20577"/>
+    </pc:docChg>
+  </pc:docChgLst>
+  <pc:docChgLst>
+    <pc:chgData name="MIGUEL TRIGUEROS MUÑOZ" userId="S::miguel.trigueros@aulaxxi.murciaeduca.es::a4ee0321-97d7-430f-98a8-7ed13ff9a4bf" providerId="AD" clId="Web-{059C4535-6492-C8B7-8BC2-029A9EBA194D}"/>
+    <pc:docChg chg="modSld">
+      <pc:chgData name="MIGUEL TRIGUEROS MUÑOZ" userId="S::miguel.trigueros@aulaxxi.murciaeduca.es::a4ee0321-97d7-430f-98a8-7ed13ff9a4bf" providerId="AD" clId="Web-{059C4535-6492-C8B7-8BC2-029A9EBA194D}" dt="2026-01-09T12:14:59.403" v="22" actId="1076"/>
+      <pc:docMkLst>
+        <pc:docMk/>
+      </pc:docMkLst>
+      <pc:sldChg chg="modSp">
+        <pc:chgData name="MIGUEL TRIGUEROS MUÑOZ" userId="S::miguel.trigueros@aulaxxi.murciaeduca.es::a4ee0321-97d7-430f-98a8-7ed13ff9a4bf" providerId="AD" clId="Web-{059C4535-6492-C8B7-8BC2-029A9EBA194D}" dt="2026-01-09T12:14:59.403" v="22" actId="1076"/>
         <pc:sldMkLst>
           <pc:docMk/>
           <pc:sldMk cId="3660112489" sldId="357"/>
         </pc:sldMkLst>
-      </pc:sldChg>
-      <pc:sldChg chg="addSp delSp modSp mod modNotesTx">
-        <pc:chgData name="MIGUEL TRIGUEROS MUÑOZ" userId="a4ee0321-97d7-430f-98a8-7ed13ff9a4bf" providerId="ADAL" clId="{5B3B6A0D-D067-4D34-8631-91ABF30A2C5B}" dt="2024-02-24T06:31:34.440" v="528" actId="20577"/>
-        <pc:sldMkLst>
-          <pc:docMk/>
-          <pc:sldMk cId="3427303393" sldId="358"/>
-        </pc:sldMkLst>
-      </pc:sldChg>
-      <pc:sldChg chg="addSp delSp modSp mod ord">
-        <pc:chgData name="MIGUEL TRIGUEROS MUÑOZ" userId="a4ee0321-97d7-430f-98a8-7ed13ff9a4bf" providerId="ADAL" clId="{5B3B6A0D-D067-4D34-8631-91ABF30A2C5B}" dt="2024-02-25T11:23:36.732" v="2098" actId="1076"/>
-        <pc:sldMkLst>
-          <pc:docMk/>
-          <pc:sldMk cId="2538212918" sldId="359"/>
-        </pc:sldMkLst>
-      </pc:sldChg>
-      <pc:sldChg chg="addSp delSp modSp mod">
-        <pc:chgData name="MIGUEL TRIGUEROS MUÑOZ" userId="a4ee0321-97d7-430f-98a8-7ed13ff9a4bf" providerId="ADAL" clId="{5B3B6A0D-D067-4D34-8631-91ABF30A2C5B}" dt="2024-02-29T08:32:06.036" v="2878" actId="14100"/>
-        <pc:sldMkLst>
-          <pc:docMk/>
-          <pc:sldMk cId="557761139" sldId="362"/>
-        </pc:sldMkLst>
-      </pc:sldChg>
-      <pc:sldChg chg="modSp mod">
-        <pc:chgData name="MIGUEL TRIGUEROS MUÑOZ" userId="a4ee0321-97d7-430f-98a8-7ed13ff9a4bf" providerId="ADAL" clId="{5B3B6A0D-D067-4D34-8631-91ABF30A2C5B}" dt="2024-02-29T07:49:19.714" v="2661" actId="1076"/>
-        <pc:sldMkLst>
-          <pc:docMk/>
-          <pc:sldMk cId="3422367261" sldId="365"/>
-        </pc:sldMkLst>
-      </pc:sldChg>
-      <pc:sldChg chg="modSp mod ord">
-        <pc:chgData name="MIGUEL TRIGUEROS MUÑOZ" userId="a4ee0321-97d7-430f-98a8-7ed13ff9a4bf" providerId="ADAL" clId="{5B3B6A0D-D067-4D34-8631-91ABF30A2C5B}" dt="2024-02-29T08:29:22.847" v="2867" actId="313"/>
-        <pc:sldMkLst>
-          <pc:docMk/>
-          <pc:sldMk cId="1115552724" sldId="366"/>
-        </pc:sldMkLst>
-      </pc:sldChg>
-      <pc:sldChg chg="addSp delSp modSp add mod modAnim modNotesTx">
-        <pc:chgData name="MIGUEL TRIGUEROS MUÑOZ" userId="a4ee0321-97d7-430f-98a8-7ed13ff9a4bf" providerId="ADAL" clId="{5B3B6A0D-D067-4D34-8631-91ABF30A2C5B}" dt="2024-02-25T10:47:37.343" v="2003"/>
-        <pc:sldMkLst>
-          <pc:docMk/>
-          <pc:sldMk cId="984522655" sldId="367"/>
-        </pc:sldMkLst>
-      </pc:sldChg>
-      <pc:sldChg chg="modSp add mod ord">
-        <pc:chgData name="MIGUEL TRIGUEROS MUÑOZ" userId="a4ee0321-97d7-430f-98a8-7ed13ff9a4bf" providerId="ADAL" clId="{5B3B6A0D-D067-4D34-8631-91ABF30A2C5B}" dt="2024-02-24T07:41:16.154" v="1393"/>
-        <pc:sldMkLst>
-          <pc:docMk/>
-          <pc:sldMk cId="3839625751" sldId="368"/>
-        </pc:sldMkLst>
-      </pc:sldChg>
-      <pc:sldChg chg="add ord">
-        <pc:chgData name="MIGUEL TRIGUEROS MUÑOZ" userId="a4ee0321-97d7-430f-98a8-7ed13ff9a4bf" providerId="ADAL" clId="{5B3B6A0D-D067-4D34-8631-91ABF30A2C5B}" dt="2024-02-24T07:51:09.250" v="1589"/>
-        <pc:sldMkLst>
-          <pc:docMk/>
-          <pc:sldMk cId="3715628655" sldId="369"/>
-        </pc:sldMkLst>
-      </pc:sldChg>
-      <pc:sldChg chg="modSp add del">
-        <pc:chgData name="MIGUEL TRIGUEROS MUÑOZ" userId="a4ee0321-97d7-430f-98a8-7ed13ff9a4bf" providerId="ADAL" clId="{5B3B6A0D-D067-4D34-8631-91ABF30A2C5B}" dt="2024-02-29T11:47:33.249" v="3618" actId="2696"/>
-        <pc:sldMkLst>
-          <pc:docMk/>
-          <pc:sldMk cId="1127960480" sldId="370"/>
-        </pc:sldMkLst>
-      </pc:sldChg>
-      <pc:sldChg chg="addSp delSp modSp add del mod delAnim">
-        <pc:chgData name="MIGUEL TRIGUEROS MUÑOZ" userId="a4ee0321-97d7-430f-98a8-7ed13ff9a4bf" providerId="ADAL" clId="{5B3B6A0D-D067-4D34-8631-91ABF30A2C5B}" dt="2024-03-03T11:04:05.132" v="4532" actId="47"/>
-        <pc:sldMkLst>
-          <pc:docMk/>
-          <pc:sldMk cId="2464792807" sldId="370"/>
-        </pc:sldMkLst>
-      </pc:sldChg>
-      <pc:sldChg chg="addSp delSp modSp add del mod delAnim">
-        <pc:chgData name="MIGUEL TRIGUEROS MUÑOZ" userId="a4ee0321-97d7-430f-98a8-7ed13ff9a4bf" providerId="ADAL" clId="{5B3B6A0D-D067-4D34-8631-91ABF30A2C5B}" dt="2024-03-03T10:36:39.821" v="4522" actId="47"/>
-        <pc:sldMkLst>
-          <pc:docMk/>
-          <pc:sldMk cId="3169159245" sldId="370"/>
-        </pc:sldMkLst>
-      </pc:sldChg>
-      <pc:sldChg chg="modSp add del">
-        <pc:chgData name="MIGUEL TRIGUEROS MUÑOZ" userId="a4ee0321-97d7-430f-98a8-7ed13ff9a4bf" providerId="ADAL" clId="{5B3B6A0D-D067-4D34-8631-91ABF30A2C5B}" dt="2024-02-29T11:47:20.629" v="3610" actId="2696"/>
-        <pc:sldMkLst>
-          <pc:docMk/>
-          <pc:sldMk cId="3894224546" sldId="370"/>
-        </pc:sldMkLst>
-      </pc:sldChg>
-    </pc:docChg>
-  </pc:docChgLst>
-  <pc:docChgLst>
-    <pc:chgData name="MIGUEL TRIGUEROS MUÑOZ" userId="a4ee0321-97d7-430f-98a8-7ed13ff9a4bf" providerId="ADAL" clId="{81D1E6E4-5095-4D69-A1A3-F192F818724E}"/>
-    <pc:docChg chg="undo custSel addSld delSld modSld modMainMaster modSection">
-      <pc:chgData name="MIGUEL TRIGUEROS MUÑOZ" userId="a4ee0321-97d7-430f-98a8-7ed13ff9a4bf" providerId="ADAL" clId="{81D1E6E4-5095-4D69-A1A3-F192F818724E}" dt="2024-09-17T14:50:38.198" v="191" actId="14100"/>
-      <pc:docMkLst>
-        <pc:docMk/>
-      </pc:docMkLst>
-      <pc:sldChg chg="addSp delSp modSp mod">
-        <pc:chgData name="MIGUEL TRIGUEROS MUÑOZ" userId="a4ee0321-97d7-430f-98a8-7ed13ff9a4bf" providerId="ADAL" clId="{81D1E6E4-5095-4D69-A1A3-F192F818724E}" dt="2024-09-17T14:50:38.198" v="191" actId="14100"/>
-        <pc:sldMkLst>
-          <pc:docMk/>
-          <pc:sldMk cId="308865771" sldId="256"/>
-        </pc:sldMkLst>
-      </pc:sldChg>
-      <pc:sldChg chg="modSp mod">
-        <pc:chgData name="MIGUEL TRIGUEROS MUÑOZ" userId="a4ee0321-97d7-430f-98a8-7ed13ff9a4bf" providerId="ADAL" clId="{81D1E6E4-5095-4D69-A1A3-F192F818724E}" dt="2024-09-17T12:26:49.300" v="121" actId="20577"/>
-        <pc:sldMkLst>
-          <pc:docMk/>
-          <pc:sldMk cId="1662085430" sldId="302"/>
-        </pc:sldMkLst>
-      </pc:sldChg>
-      <pc:sldChg chg="modSp mod">
-        <pc:chgData name="MIGUEL TRIGUEROS MUÑOZ" userId="a4ee0321-97d7-430f-98a8-7ed13ff9a4bf" providerId="ADAL" clId="{81D1E6E4-5095-4D69-A1A3-F192F818724E}" dt="2024-09-17T12:21:31.103" v="57" actId="13926"/>
-        <pc:sldMkLst>
-          <pc:docMk/>
-          <pc:sldMk cId="745458148" sldId="314"/>
-        </pc:sldMkLst>
-      </pc:sldChg>
-      <pc:sldChg chg="modSp mod modClrScheme chgLayout">
-        <pc:chgData name="MIGUEL TRIGUEROS MUÑOZ" userId="a4ee0321-97d7-430f-98a8-7ed13ff9a4bf" providerId="ADAL" clId="{81D1E6E4-5095-4D69-A1A3-F192F818724E}" dt="2024-09-17T12:23:35.041" v="68" actId="700"/>
-        <pc:sldMkLst>
-          <pc:docMk/>
-          <pc:sldMk cId="634721557" sldId="316"/>
-        </pc:sldMkLst>
-      </pc:sldChg>
-      <pc:sldChg chg="modSp mod modClrScheme chgLayout">
-        <pc:chgData name="MIGUEL TRIGUEROS MUÑOZ" userId="a4ee0321-97d7-430f-98a8-7ed13ff9a4bf" providerId="ADAL" clId="{81D1E6E4-5095-4D69-A1A3-F192F818724E}" dt="2024-09-17T14:49:08.423" v="180" actId="1076"/>
-        <pc:sldMkLst>
-          <pc:docMk/>
-          <pc:sldMk cId="2154345873" sldId="317"/>
-        </pc:sldMkLst>
-      </pc:sldChg>
-      <pc:sldChg chg="modSp mod modClrScheme chgLayout">
-        <pc:chgData name="MIGUEL TRIGUEROS MUÑOZ" userId="a4ee0321-97d7-430f-98a8-7ed13ff9a4bf" providerId="ADAL" clId="{81D1E6E4-5095-4D69-A1A3-F192F818724E}" dt="2024-09-17T12:24:09.299" v="74" actId="700"/>
-        <pc:sldMkLst>
-          <pc:docMk/>
-          <pc:sldMk cId="3289438449" sldId="318"/>
-        </pc:sldMkLst>
-      </pc:sldChg>
-      <pc:sldChg chg="addSp delSp modSp mod modClrScheme chgLayout">
-        <pc:chgData name="MIGUEL TRIGUEROS MUÑOZ" userId="a4ee0321-97d7-430f-98a8-7ed13ff9a4bf" providerId="ADAL" clId="{81D1E6E4-5095-4D69-A1A3-F192F818724E}" dt="2024-09-17T14:48:32.072" v="170" actId="1076"/>
-        <pc:sldMkLst>
-          <pc:docMk/>
-          <pc:sldMk cId="1059083778" sldId="319"/>
-        </pc:sldMkLst>
-      </pc:sldChg>
-      <pc:sldChg chg="addSp delSp modSp mod modClrScheme chgLayout">
-        <pc:chgData name="MIGUEL TRIGUEROS MUÑOZ" userId="a4ee0321-97d7-430f-98a8-7ed13ff9a4bf" providerId="ADAL" clId="{81D1E6E4-5095-4D69-A1A3-F192F818724E}" dt="2024-09-17T14:47:15.166" v="158" actId="1076"/>
-        <pc:sldMkLst>
-          <pc:docMk/>
-          <pc:sldMk cId="3948044143" sldId="320"/>
-        </pc:sldMkLst>
-      </pc:sldChg>
-      <pc:sldChg chg="modSp">
-        <pc:chgData name="MIGUEL TRIGUEROS MUÑOZ" userId="a4ee0321-97d7-430f-98a8-7ed13ff9a4bf" providerId="ADAL" clId="{81D1E6E4-5095-4D69-A1A3-F192F818724E}" dt="2024-09-17T12:20:47.499" v="50"/>
-        <pc:sldMkLst>
-          <pc:docMk/>
-          <pc:sldMk cId="3771477886" sldId="321"/>
-        </pc:sldMkLst>
-      </pc:sldChg>
-      <pc:sldChg chg="addSp delSp modSp mod modClrScheme chgLayout">
-        <pc:chgData name="MIGUEL TRIGUEROS MUÑOZ" userId="a4ee0321-97d7-430f-98a8-7ed13ff9a4bf" providerId="ADAL" clId="{81D1E6E4-5095-4D69-A1A3-F192F818724E}" dt="2024-09-17T12:24:34.206" v="94" actId="27636"/>
-        <pc:sldMkLst>
-          <pc:docMk/>
-          <pc:sldMk cId="675174442" sldId="322"/>
-        </pc:sldMkLst>
-      </pc:sldChg>
-      <pc:sldChg chg="addSp modSp mod modClrScheme chgLayout">
-        <pc:chgData name="MIGUEL TRIGUEROS MUÑOZ" userId="a4ee0321-97d7-430f-98a8-7ed13ff9a4bf" providerId="ADAL" clId="{81D1E6E4-5095-4D69-A1A3-F192F818724E}" dt="2024-09-17T12:28:53.739" v="134"/>
-        <pc:sldMkLst>
-          <pc:docMk/>
-          <pc:sldMk cId="4268188109" sldId="323"/>
-        </pc:sldMkLst>
-      </pc:sldChg>
-      <pc:sldChg chg="addSp modSp mod modClrScheme chgLayout">
-        <pc:chgData name="MIGUEL TRIGUEROS MUÑOZ" userId="a4ee0321-97d7-430f-98a8-7ed13ff9a4bf" providerId="ADAL" clId="{81D1E6E4-5095-4D69-A1A3-F192F818724E}" dt="2024-09-17T14:45:27.291" v="144"/>
-        <pc:sldMkLst>
-          <pc:docMk/>
-          <pc:sldMk cId="4205591290" sldId="324"/>
-        </pc:sldMkLst>
-      </pc:sldChg>
-      <pc:sldChg chg="addSp modSp mod modClrScheme chgLayout">
-        <pc:chgData name="MIGUEL TRIGUEROS MUÑOZ" userId="a4ee0321-97d7-430f-98a8-7ed13ff9a4bf" providerId="ADAL" clId="{81D1E6E4-5095-4D69-A1A3-F192F818724E}" dt="2024-09-17T14:45:32.878" v="146"/>
-        <pc:sldMkLst>
-          <pc:docMk/>
-          <pc:sldMk cId="3317774778" sldId="325"/>
-        </pc:sldMkLst>
-      </pc:sldChg>
-      <pc:sldChg chg="addSp delSp modSp mod modClrScheme chgLayout">
-        <pc:chgData name="MIGUEL TRIGUEROS MUÑOZ" userId="a4ee0321-97d7-430f-98a8-7ed13ff9a4bf" providerId="ADAL" clId="{81D1E6E4-5095-4D69-A1A3-F192F818724E}" dt="2024-09-17T14:46:13.874" v="150" actId="1076"/>
-        <pc:sldMkLst>
-          <pc:docMk/>
-          <pc:sldMk cId="94322529" sldId="326"/>
-        </pc:sldMkLst>
-      </pc:sldChg>
-      <pc:sldChg chg="modSp del">
-        <pc:chgData name="MIGUEL TRIGUEROS MUÑOZ" userId="a4ee0321-97d7-430f-98a8-7ed13ff9a4bf" providerId="ADAL" clId="{81D1E6E4-5095-4D69-A1A3-F192F818724E}" dt="2024-09-17T12:26:27.727" v="112" actId="47"/>
-        <pc:sldMkLst>
-          <pc:docMk/>
-          <pc:sldMk cId="2044085444" sldId="327"/>
-        </pc:sldMkLst>
-      </pc:sldChg>
-      <pc:sldChg chg="modSp del">
-        <pc:chgData name="MIGUEL TRIGUEROS MUÑOZ" userId="a4ee0321-97d7-430f-98a8-7ed13ff9a4bf" providerId="ADAL" clId="{81D1E6E4-5095-4D69-A1A3-F192F818724E}" dt="2024-09-17T12:26:27.727" v="112" actId="47"/>
-        <pc:sldMkLst>
-          <pc:docMk/>
-          <pc:sldMk cId="155112023" sldId="328"/>
-        </pc:sldMkLst>
-      </pc:sldChg>
-      <pc:sldChg chg="modSp del">
-        <pc:chgData name="MIGUEL TRIGUEROS MUÑOZ" userId="a4ee0321-97d7-430f-98a8-7ed13ff9a4bf" providerId="ADAL" clId="{81D1E6E4-5095-4D69-A1A3-F192F818724E}" dt="2024-09-17T12:26:27.727" v="112" actId="47"/>
-        <pc:sldMkLst>
-          <pc:docMk/>
-          <pc:sldMk cId="1498135890" sldId="329"/>
-        </pc:sldMkLst>
-      </pc:sldChg>
-      <pc:sldChg chg="modSp del">
-        <pc:chgData name="MIGUEL TRIGUEROS MUÑOZ" userId="a4ee0321-97d7-430f-98a8-7ed13ff9a4bf" providerId="ADAL" clId="{81D1E6E4-5095-4D69-A1A3-F192F818724E}" dt="2024-09-17T12:26:27.727" v="112" actId="47"/>
-        <pc:sldMkLst>
-          <pc:docMk/>
-          <pc:sldMk cId="385184565" sldId="330"/>
-        </pc:sldMkLst>
-      </pc:sldChg>
-      <pc:sldChg chg="modSp del">
-        <pc:chgData name="MIGUEL TRIGUEROS MUÑOZ" userId="a4ee0321-97d7-430f-98a8-7ed13ff9a4bf" providerId="ADAL" clId="{81D1E6E4-5095-4D69-A1A3-F192F818724E}" dt="2024-09-17T12:26:27.727" v="112" actId="47"/>
-        <pc:sldMkLst>
-          <pc:docMk/>
-          <pc:sldMk cId="3659872342" sldId="332"/>
-        </pc:sldMkLst>
-      </pc:sldChg>
-      <pc:sldChg chg="modSp del">
-        <pc:chgData name="MIGUEL TRIGUEROS MUÑOZ" userId="a4ee0321-97d7-430f-98a8-7ed13ff9a4bf" providerId="ADAL" clId="{81D1E6E4-5095-4D69-A1A3-F192F818724E}" dt="2024-09-17T12:26:27.727" v="112" actId="47"/>
-        <pc:sldMkLst>
-          <pc:docMk/>
-          <pc:sldMk cId="952270227" sldId="333"/>
-        </pc:sldMkLst>
-      </pc:sldChg>
-      <pc:sldChg chg="modSp del">
-        <pc:chgData name="MIGUEL TRIGUEROS MUÑOZ" userId="a4ee0321-97d7-430f-98a8-7ed13ff9a4bf" providerId="ADAL" clId="{81D1E6E4-5095-4D69-A1A3-F192F818724E}" dt="2024-09-17T12:26:27.727" v="112" actId="47"/>
-        <pc:sldMkLst>
-          <pc:docMk/>
-          <pc:sldMk cId="520146235" sldId="340"/>
-        </pc:sldMkLst>
-      </pc:sldChg>
-      <pc:sldChg chg="modSp mod modClrScheme chgLayout">
-        <pc:chgData name="MIGUEL TRIGUEROS MUÑOZ" userId="a4ee0321-97d7-430f-98a8-7ed13ff9a4bf" providerId="ADAL" clId="{81D1E6E4-5095-4D69-A1A3-F192F818724E}" dt="2024-09-17T12:23:21.220" v="66" actId="700"/>
-        <pc:sldMkLst>
-          <pc:docMk/>
-          <pc:sldMk cId="1536049848" sldId="347"/>
-        </pc:sldMkLst>
-      </pc:sldChg>
-      <pc:sldChg chg="modSp del">
-        <pc:chgData name="MIGUEL TRIGUEROS MUÑOZ" userId="a4ee0321-97d7-430f-98a8-7ed13ff9a4bf" providerId="ADAL" clId="{81D1E6E4-5095-4D69-A1A3-F192F818724E}" dt="2024-09-17T12:26:27.727" v="112" actId="47"/>
-        <pc:sldMkLst>
-          <pc:docMk/>
-          <pc:sldMk cId="2896794478" sldId="348"/>
-        </pc:sldMkLst>
-      </pc:sldChg>
-      <pc:sldChg chg="modSp del mod">
-        <pc:chgData name="MIGUEL TRIGUEROS MUÑOZ" userId="a4ee0321-97d7-430f-98a8-7ed13ff9a4bf" providerId="ADAL" clId="{81D1E6E4-5095-4D69-A1A3-F192F818724E}" dt="2024-09-17T12:22:42.230" v="58" actId="47"/>
-        <pc:sldMkLst>
-          <pc:docMk/>
-          <pc:sldMk cId="75957562" sldId="350"/>
-        </pc:sldMkLst>
-      </pc:sldChg>
-      <pc:sldChg chg="modSp del">
-        <pc:chgData name="MIGUEL TRIGUEROS MUÑOZ" userId="a4ee0321-97d7-430f-98a8-7ed13ff9a4bf" providerId="ADAL" clId="{81D1E6E4-5095-4D69-A1A3-F192F818724E}" dt="2024-09-17T12:22:45.167" v="61" actId="47"/>
-        <pc:sldMkLst>
-          <pc:docMk/>
-          <pc:sldMk cId="1962823157" sldId="351"/>
-        </pc:sldMkLst>
-      </pc:sldChg>
-      <pc:sldChg chg="modSp del">
-        <pc:chgData name="MIGUEL TRIGUEROS MUÑOZ" userId="a4ee0321-97d7-430f-98a8-7ed13ff9a4bf" providerId="ADAL" clId="{81D1E6E4-5095-4D69-A1A3-F192F818724E}" dt="2024-09-17T12:22:45.933" v="62" actId="47"/>
-        <pc:sldMkLst>
-          <pc:docMk/>
-          <pc:sldMk cId="3809256849" sldId="352"/>
-        </pc:sldMkLst>
-      </pc:sldChg>
-      <pc:sldChg chg="modSp del">
-        <pc:chgData name="MIGUEL TRIGUEROS MUÑOZ" userId="a4ee0321-97d7-430f-98a8-7ed13ff9a4bf" providerId="ADAL" clId="{81D1E6E4-5095-4D69-A1A3-F192F818724E}" dt="2024-09-17T12:22:46.753" v="63" actId="47"/>
-        <pc:sldMkLst>
-          <pc:docMk/>
-          <pc:sldMk cId="3325289584" sldId="353"/>
-        </pc:sldMkLst>
-      </pc:sldChg>
-      <pc:sldChg chg="modSp del">
-        <pc:chgData name="MIGUEL TRIGUEROS MUÑOZ" userId="a4ee0321-97d7-430f-98a8-7ed13ff9a4bf" providerId="ADAL" clId="{81D1E6E4-5095-4D69-A1A3-F192F818724E}" dt="2024-09-17T12:22:43.175" v="59" actId="47"/>
-        <pc:sldMkLst>
-          <pc:docMk/>
-          <pc:sldMk cId="2503801394" sldId="354"/>
-        </pc:sldMkLst>
-      </pc:sldChg>
-      <pc:sldChg chg="modSp del">
-        <pc:chgData name="MIGUEL TRIGUEROS MUÑOZ" userId="a4ee0321-97d7-430f-98a8-7ed13ff9a4bf" providerId="ADAL" clId="{81D1E6E4-5095-4D69-A1A3-F192F818724E}" dt="2024-09-17T12:22:44.389" v="60" actId="47"/>
-        <pc:sldMkLst>
-          <pc:docMk/>
-          <pc:sldMk cId="2618476077" sldId="355"/>
-        </pc:sldMkLst>
-      </pc:sldChg>
-      <pc:sldChg chg="addSp delSp modSp mod modClrScheme chgLayout">
-        <pc:chgData name="MIGUEL TRIGUEROS MUÑOZ" userId="a4ee0321-97d7-430f-98a8-7ed13ff9a4bf" providerId="ADAL" clId="{81D1E6E4-5095-4D69-A1A3-F192F818724E}" dt="2024-09-17T14:49:30.526" v="181" actId="14100"/>
-        <pc:sldMkLst>
-          <pc:docMk/>
-          <pc:sldMk cId="3249296326" sldId="356"/>
-        </pc:sldMkLst>
-      </pc:sldChg>
-      <pc:sldChg chg="addSp modSp mod modClrScheme chgLayout">
-        <pc:chgData name="MIGUEL TRIGUEROS MUÑOZ" userId="a4ee0321-97d7-430f-98a8-7ed13ff9a4bf" providerId="ADAL" clId="{81D1E6E4-5095-4D69-A1A3-F192F818724E}" dt="2024-09-17T12:28:36.577" v="130"/>
-        <pc:sldMkLst>
-          <pc:docMk/>
-          <pc:sldMk cId="3660112489" sldId="357"/>
-        </pc:sldMkLst>
-      </pc:sldChg>
-      <pc:sldChg chg="addSp delSp modSp mod modClrScheme chgLayout">
-        <pc:chgData name="MIGUEL TRIGUEROS MUÑOZ" userId="a4ee0321-97d7-430f-98a8-7ed13ff9a4bf" providerId="ADAL" clId="{81D1E6E4-5095-4D69-A1A3-F192F818724E}" dt="2024-09-17T12:28:19.309" v="128" actId="478"/>
-        <pc:sldMkLst>
-          <pc:docMk/>
-          <pc:sldMk cId="3427303393" sldId="358"/>
-        </pc:sldMkLst>
-      </pc:sldChg>
-      <pc:sldChg chg="addSp modSp mod modClrScheme chgLayout">
-        <pc:chgData name="MIGUEL TRIGUEROS MUÑOZ" userId="a4ee0321-97d7-430f-98a8-7ed13ff9a4bf" providerId="ADAL" clId="{81D1E6E4-5095-4D69-A1A3-F192F818724E}" dt="2024-09-17T12:29:03.897" v="137"/>
-        <pc:sldMkLst>
-          <pc:docMk/>
-          <pc:sldMk cId="2538212918" sldId="359"/>
-        </pc:sldMkLst>
-      </pc:sldChg>
-      <pc:sldChg chg="modSp">
-        <pc:chgData name="MIGUEL TRIGUEROS MUÑOZ" userId="a4ee0321-97d7-430f-98a8-7ed13ff9a4bf" providerId="ADAL" clId="{81D1E6E4-5095-4D69-A1A3-F192F818724E}" dt="2024-09-17T12:20:47.499" v="50"/>
-        <pc:sldMkLst>
-          <pc:docMk/>
-          <pc:sldMk cId="2860104298" sldId="360"/>
-        </pc:sldMkLst>
-      </pc:sldChg>
-      <pc:sldChg chg="modSp del">
-        <pc:chgData name="MIGUEL TRIGUEROS MUÑOZ" userId="a4ee0321-97d7-430f-98a8-7ed13ff9a4bf" providerId="ADAL" clId="{81D1E6E4-5095-4D69-A1A3-F192F818724E}" dt="2024-09-17T12:26:27.727" v="112" actId="47"/>
-        <pc:sldMkLst>
-          <pc:docMk/>
-          <pc:sldMk cId="126456270" sldId="361"/>
-        </pc:sldMkLst>
-      </pc:sldChg>
-      <pc:sldChg chg="modSp del">
-        <pc:chgData name="MIGUEL TRIGUEROS MUÑOZ" userId="a4ee0321-97d7-430f-98a8-7ed13ff9a4bf" providerId="ADAL" clId="{81D1E6E4-5095-4D69-A1A3-F192F818724E}" dt="2024-09-17T12:26:27.727" v="112" actId="47"/>
-        <pc:sldMkLst>
-          <pc:docMk/>
-          <pc:sldMk cId="557761139" sldId="362"/>
-        </pc:sldMkLst>
-      </pc:sldChg>
-      <pc:sldChg chg="modSp">
-        <pc:chgData name="MIGUEL TRIGUEROS MUÑOZ" userId="a4ee0321-97d7-430f-98a8-7ed13ff9a4bf" providerId="ADAL" clId="{81D1E6E4-5095-4D69-A1A3-F192F818724E}" dt="2024-09-17T12:20:47.499" v="50"/>
-        <pc:sldMkLst>
-          <pc:docMk/>
-          <pc:sldMk cId="2951450419" sldId="363"/>
-        </pc:sldMkLst>
-      </pc:sldChg>
-      <pc:sldChg chg="modSp mod modClrScheme chgLayout">
-        <pc:chgData name="MIGUEL TRIGUEROS MUÑOZ" userId="a4ee0321-97d7-430f-98a8-7ed13ff9a4bf" providerId="ADAL" clId="{81D1E6E4-5095-4D69-A1A3-F192F818724E}" dt="2024-09-17T12:23:26.797" v="67" actId="700"/>
-        <pc:sldMkLst>
-          <pc:docMk/>
-          <pc:sldMk cId="941241975" sldId="364"/>
-        </pc:sldMkLst>
-      </pc:sldChg>
-      <pc:sldChg chg="modSp del">
-        <pc:chgData name="MIGUEL TRIGUEROS MUÑOZ" userId="a4ee0321-97d7-430f-98a8-7ed13ff9a4bf" providerId="ADAL" clId="{81D1E6E4-5095-4D69-A1A3-F192F818724E}" dt="2024-09-17T12:26:27.727" v="112" actId="47"/>
-        <pc:sldMkLst>
-          <pc:docMk/>
-          <pc:sldMk cId="3422367261" sldId="365"/>
-        </pc:sldMkLst>
-      </pc:sldChg>
-      <pc:sldChg chg="modSp del">
-        <pc:chgData name="MIGUEL TRIGUEROS MUÑOZ" userId="a4ee0321-97d7-430f-98a8-7ed13ff9a4bf" providerId="ADAL" clId="{81D1E6E4-5095-4D69-A1A3-F192F818724E}" dt="2024-09-17T12:26:27.727" v="112" actId="47"/>
-        <pc:sldMkLst>
-          <pc:docMk/>
-          <pc:sldMk cId="1115552724" sldId="366"/>
-        </pc:sldMkLst>
-      </pc:sldChg>
-      <pc:sldChg chg="addSp modSp mod modClrScheme chgLayout">
-        <pc:chgData name="MIGUEL TRIGUEROS MUÑOZ" userId="a4ee0321-97d7-430f-98a8-7ed13ff9a4bf" providerId="ADAL" clId="{81D1E6E4-5095-4D69-A1A3-F192F818724E}" dt="2024-09-17T12:29:09.475" v="139"/>
-        <pc:sldMkLst>
-          <pc:docMk/>
-          <pc:sldMk cId="984522655" sldId="367"/>
-        </pc:sldMkLst>
-      </pc:sldChg>
-      <pc:sldChg chg="addSp modSp mod modClrScheme chgLayout">
-        <pc:chgData name="MIGUEL TRIGUEROS MUÑOZ" userId="a4ee0321-97d7-430f-98a8-7ed13ff9a4bf" providerId="ADAL" clId="{81D1E6E4-5095-4D69-A1A3-F192F818724E}" dt="2024-09-17T12:28:47.591" v="132"/>
-        <pc:sldMkLst>
-          <pc:docMk/>
-          <pc:sldMk cId="3839625751" sldId="368"/>
-        </pc:sldMkLst>
-      </pc:sldChg>
-      <pc:sldChg chg="addSp modSp mod modClrScheme chgLayout">
-        <pc:chgData name="MIGUEL TRIGUEROS MUÑOZ" userId="a4ee0321-97d7-430f-98a8-7ed13ff9a4bf" providerId="ADAL" clId="{81D1E6E4-5095-4D69-A1A3-F192F818724E}" dt="2024-09-17T12:29:18.582" v="142"/>
-        <pc:sldMkLst>
-          <pc:docMk/>
-          <pc:sldMk cId="3715628655" sldId="369"/>
-        </pc:sldMkLst>
-      </pc:sldChg>
-      <pc:sldChg chg="modSp add del">
-        <pc:chgData name="MIGUEL TRIGUEROS MUÑOZ" userId="a4ee0321-97d7-430f-98a8-7ed13ff9a4bf" providerId="ADAL" clId="{81D1E6E4-5095-4D69-A1A3-F192F818724E}" dt="2024-09-17T12:27:58.715" v="124" actId="2696"/>
-        <pc:sldMkLst>
-          <pc:docMk/>
-          <pc:sldMk cId="3154028104" sldId="370"/>
-        </pc:sldMkLst>
-      </pc:sldChg>
-      <pc:sldMasterChg chg="addSp modSldLayout">
-        <pc:chgData name="MIGUEL TRIGUEROS MUÑOZ" userId="a4ee0321-97d7-430f-98a8-7ed13ff9a4bf" providerId="ADAL" clId="{81D1E6E4-5095-4D69-A1A3-F192F818724E}" dt="2024-09-17T12:20:47.499" v="50"/>
-        <pc:sldMasterMkLst>
-          <pc:docMk/>
-          <pc:sldMasterMk cId="455763939" sldId="2147483686"/>
-        </pc:sldMasterMkLst>
-        <pc:sldLayoutChg chg="modSp">
-          <pc:chgData name="MIGUEL TRIGUEROS MUÑOZ" userId="a4ee0321-97d7-430f-98a8-7ed13ff9a4bf" providerId="ADAL" clId="{81D1E6E4-5095-4D69-A1A3-F192F818724E}" dt="2024-09-17T12:20:47.499" v="50"/>
-          <pc:sldLayoutMkLst>
+        <pc:spChg chg="mod">
+          <ac:chgData name="MIGUEL TRIGUEROS MUÑOZ" userId="S::miguel.trigueros@aulaxxi.murciaeduca.es::a4ee0321-97d7-430f-98a8-7ed13ff9a4bf" providerId="AD" clId="Web-{059C4535-6492-C8B7-8BC2-029A9EBA194D}" dt="2026-01-09T12:14:31.965" v="15" actId="14100"/>
+          <ac:spMkLst>
             <pc:docMk/>
-            <pc:sldMasterMk cId="455763939" sldId="2147483686"/>
-            <pc:sldLayoutMk cId="2151700916" sldId="2147483669"/>
-          </pc:sldLayoutMkLst>
-        </pc:sldLayoutChg>
-      </pc:sldMasterChg>
-    </pc:docChg>
-  </pc:docChgLst>
-  <pc:docChgLst>
-    <pc:chgData name="MIGUEL TRIGUEROS MUÑOZ" userId="a4ee0321-97d7-430f-98a8-7ed13ff9a4bf" providerId="ADAL" clId="{6F89BEEB-4604-4287-9743-513654D87D88}"/>
-    <pc:docChg chg="undo custSel addSld delSld modSld modSection">
-      <pc:chgData name="MIGUEL TRIGUEROS MUÑOZ" userId="a4ee0321-97d7-430f-98a8-7ed13ff9a4bf" providerId="ADAL" clId="{6F89BEEB-4604-4287-9743-513654D87D88}" dt="2024-05-18T07:23:02.373" v="64" actId="1076"/>
-      <pc:docMkLst>
-        <pc:docMk/>
-      </pc:docMkLst>
-      <pc:sldChg chg="modSp mod">
-        <pc:chgData name="MIGUEL TRIGUEROS MUÑOZ" userId="a4ee0321-97d7-430f-98a8-7ed13ff9a4bf" providerId="ADAL" clId="{6F89BEEB-4604-4287-9743-513654D87D88}" dt="2024-05-18T06:14:14.735" v="4" actId="13926"/>
-        <pc:sldMkLst>
-          <pc:docMk/>
-          <pc:sldMk cId="1059083778" sldId="319"/>
-        </pc:sldMkLst>
-      </pc:sldChg>
-      <pc:sldChg chg="modSp mod">
-        <pc:chgData name="MIGUEL TRIGUEROS MUÑOZ" userId="a4ee0321-97d7-430f-98a8-7ed13ff9a4bf" providerId="ADAL" clId="{6F89BEEB-4604-4287-9743-513654D87D88}" dt="2024-05-18T06:14:41.999" v="12" actId="13926"/>
-        <pc:sldMkLst>
-          <pc:docMk/>
-          <pc:sldMk cId="3948044143" sldId="320"/>
-        </pc:sldMkLst>
-      </pc:sldChg>
-      <pc:sldChg chg="modSp mod">
-        <pc:chgData name="MIGUEL TRIGUEROS MUÑOZ" userId="a4ee0321-97d7-430f-98a8-7ed13ff9a4bf" providerId="ADAL" clId="{6F89BEEB-4604-4287-9743-513654D87D88}" dt="2024-05-18T06:18:35.041" v="17" actId="14100"/>
-        <pc:sldMkLst>
-          <pc:docMk/>
-          <pc:sldMk cId="3317774778" sldId="325"/>
-        </pc:sldMkLst>
-      </pc:sldChg>
-      <pc:sldChg chg="modSp mod">
-        <pc:chgData name="MIGUEL TRIGUEROS MUÑOZ" userId="a4ee0321-97d7-430f-98a8-7ed13ff9a4bf" providerId="ADAL" clId="{6F89BEEB-4604-4287-9743-513654D87D88}" dt="2024-05-18T06:19:14.512" v="18" actId="207"/>
-        <pc:sldMkLst>
-          <pc:docMk/>
-          <pc:sldMk cId="2044085444" sldId="327"/>
-        </pc:sldMkLst>
-      </pc:sldChg>
-      <pc:sldChg chg="modSp mod">
-        <pc:chgData name="MIGUEL TRIGUEROS MUÑOZ" userId="a4ee0321-97d7-430f-98a8-7ed13ff9a4bf" providerId="ADAL" clId="{6F89BEEB-4604-4287-9743-513654D87D88}" dt="2024-05-18T06:15:20.882" v="15" actId="207"/>
-        <pc:sldMkLst>
-          <pc:docMk/>
-          <pc:sldMk cId="3660112489" sldId="357"/>
-        </pc:sldMkLst>
-      </pc:sldChg>
-      <pc:sldChg chg="modSp mod">
-        <pc:chgData name="MIGUEL TRIGUEROS MUÑOZ" userId="a4ee0321-97d7-430f-98a8-7ed13ff9a4bf" providerId="ADAL" clId="{6F89BEEB-4604-4287-9743-513654D87D88}" dt="2024-05-18T06:13:23.811" v="2" actId="207"/>
-        <pc:sldMkLst>
-          <pc:docMk/>
-          <pc:sldMk cId="3427303393" sldId="358"/>
-        </pc:sldMkLst>
-      </pc:sldChg>
-      <pc:sldChg chg="modSp mod">
-        <pc:chgData name="MIGUEL TRIGUEROS MUÑOZ" userId="a4ee0321-97d7-430f-98a8-7ed13ff9a4bf" providerId="ADAL" clId="{6F89BEEB-4604-4287-9743-513654D87D88}" dt="2024-05-18T07:23:02.373" v="64" actId="1076"/>
-        <pc:sldMkLst>
-          <pc:docMk/>
-          <pc:sldMk cId="557761139" sldId="362"/>
-        </pc:sldMkLst>
-      </pc:sldChg>
-      <pc:sldChg chg="modSp mod">
-        <pc:chgData name="MIGUEL TRIGUEROS MUÑOZ" userId="a4ee0321-97d7-430f-98a8-7ed13ff9a4bf" providerId="ADAL" clId="{6F89BEEB-4604-4287-9743-513654D87D88}" dt="2024-05-18T06:24:43.874" v="39" actId="20577"/>
-        <pc:sldMkLst>
-          <pc:docMk/>
-          <pc:sldMk cId="3422367261" sldId="365"/>
-        </pc:sldMkLst>
-      </pc:sldChg>
-      <pc:sldChg chg="addSp delSp modSp add del mod">
-        <pc:chgData name="MIGUEL TRIGUEROS MUÑOZ" userId="a4ee0321-97d7-430f-98a8-7ed13ff9a4bf" providerId="ADAL" clId="{6F89BEEB-4604-4287-9743-513654D87D88}" dt="2024-05-18T06:46:04.020" v="63" actId="47"/>
-        <pc:sldMkLst>
-          <pc:docMk/>
-          <pc:sldMk cId="1143496369" sldId="370"/>
-        </pc:sldMkLst>
-      </pc:sldChg>
-    </pc:docChg>
-  </pc:docChgLst>
-  <pc:docChgLst>
-    <pc:chgData name="MIGUEL TRIGUEROS MUÑOZ" userId="S::miguel.trigueros@aulaxxi.murciaeduca.es::a4ee0321-97d7-430f-98a8-7ed13ff9a4bf" providerId="AD" clId="Web-{5658E38A-62A6-8B9D-2F28-F3FBBC48BAFB}"/>
-    <pc:docChg chg="modSld">
-      <pc:chgData name="MIGUEL TRIGUEROS MUÑOZ" userId="S::miguel.trigueros@aulaxxi.murciaeduca.es::a4ee0321-97d7-430f-98a8-7ed13ff9a4bf" providerId="AD" clId="Web-{5658E38A-62A6-8B9D-2F28-F3FBBC48BAFB}" dt="2025-01-16T12:32:44.102" v="20" actId="20577"/>
-      <pc:docMkLst>
-        <pc:docMk/>
-      </pc:docMkLst>
-      <pc:sldChg chg="modSp">
-        <pc:chgData name="MIGUEL TRIGUEROS MUÑOZ" userId="S::miguel.trigueros@aulaxxi.murciaeduca.es::a4ee0321-97d7-430f-98a8-7ed13ff9a4bf" providerId="AD" clId="Web-{5658E38A-62A6-8B9D-2F28-F3FBBC48BAFB}" dt="2025-01-16T12:32:44.102" v="20" actId="20577"/>
-        <pc:sldMkLst>
-          <pc:docMk/>
-          <pc:sldMk cId="1662085430" sldId="302"/>
-        </pc:sldMkLst>
-      </pc:sldChg>
-    </pc:docChg>
-  </pc:docChgLst>
-  <pc:docChgLst>
-    <pc:chgData name="MIGUEL TRIGUEROS MUÑOZ" userId="S::miguel.trigueros@aulaxxi.murciaeduca.es::a4ee0321-97d7-430f-98a8-7ed13ff9a4bf" providerId="AD" clId="Web-{9AAD3A13-4445-8DB0-A04D-8F92A5E5AB8A}"/>
-    <pc:docChg chg="modSld">
-      <pc:chgData name="MIGUEL TRIGUEROS MUÑOZ" userId="S::miguel.trigueros@aulaxxi.murciaeduca.es::a4ee0321-97d7-430f-98a8-7ed13ff9a4bf" providerId="AD" clId="Web-{9AAD3A13-4445-8DB0-A04D-8F92A5E5AB8A}" dt="2025-01-14T09:05:52.955" v="10" actId="20577"/>
-      <pc:docMkLst>
-        <pc:docMk/>
-      </pc:docMkLst>
-      <pc:sldChg chg="modSp">
-        <pc:chgData name="MIGUEL TRIGUEROS MUÑOZ" userId="S::miguel.trigueros@aulaxxi.murciaeduca.es::a4ee0321-97d7-430f-98a8-7ed13ff9a4bf" providerId="AD" clId="Web-{9AAD3A13-4445-8DB0-A04D-8F92A5E5AB8A}" dt="2025-01-14T09:05:52.955" v="10" actId="20577"/>
-        <pc:sldMkLst>
-          <pc:docMk/>
-          <pc:sldMk cId="1662085430" sldId="302"/>
-        </pc:sldMkLst>
-      </pc:sldChg>
-      <pc:sldChg chg="modSp">
-        <pc:chgData name="MIGUEL TRIGUEROS MUÑOZ" userId="S::miguel.trigueros@aulaxxi.murciaeduca.es::a4ee0321-97d7-430f-98a8-7ed13ff9a4bf" providerId="AD" clId="Web-{9AAD3A13-4445-8DB0-A04D-8F92A5E5AB8A}" dt="2025-01-14T09:04:20.718" v="4" actId="20577"/>
-        <pc:sldMkLst>
-          <pc:docMk/>
-          <pc:sldMk cId="3317774778" sldId="325"/>
-        </pc:sldMkLst>
-      </pc:sldChg>
-    </pc:docChg>
-  </pc:docChgLst>
-  <pc:docChgLst>
-    <pc:chgData name="MIGUEL TRIGUEROS MUÑOZ" userId="a4ee0321-97d7-430f-98a8-7ed13ff9a4bf" providerId="ADAL" clId="{4FB88970-05DB-46A1-9CD2-4E70D2F5878A}"/>
-    <pc:docChg chg="custSel addSld modSld sldOrd modMainMaster delSection">
-      <pc:chgData name="MIGUEL TRIGUEROS MUÑOZ" userId="a4ee0321-97d7-430f-98a8-7ed13ff9a4bf" providerId="ADAL" clId="{4FB88970-05DB-46A1-9CD2-4E70D2F5878A}" dt="2025-02-06T12:28:05.659" v="1411" actId="13926"/>
-      <pc:docMkLst>
-        <pc:docMk/>
-      </pc:docMkLst>
-      <pc:sldChg chg="modSp mod">
-        <pc:chgData name="MIGUEL TRIGUEROS MUÑOZ" userId="a4ee0321-97d7-430f-98a8-7ed13ff9a4bf" providerId="ADAL" clId="{4FB88970-05DB-46A1-9CD2-4E70D2F5878A}" dt="2025-01-27T21:02:26.172" v="1405" actId="20577"/>
-        <pc:sldMkLst>
-          <pc:docMk/>
-          <pc:sldMk cId="1662085430" sldId="302"/>
-        </pc:sldMkLst>
-      </pc:sldChg>
-      <pc:sldChg chg="modSp mod">
-        <pc:chgData name="MIGUEL TRIGUEROS MUÑOZ" userId="a4ee0321-97d7-430f-98a8-7ed13ff9a4bf" providerId="ADAL" clId="{4FB88970-05DB-46A1-9CD2-4E70D2F5878A}" dt="2025-01-06T15:44:20.044" v="141" actId="1076"/>
-        <pc:sldMkLst>
-          <pc:docMk/>
-          <pc:sldMk cId="2154345873" sldId="317"/>
-        </pc:sldMkLst>
-      </pc:sldChg>
-      <pc:sldChg chg="modSp mod">
-        <pc:chgData name="MIGUEL TRIGUEROS MUÑOZ" userId="a4ee0321-97d7-430f-98a8-7ed13ff9a4bf" providerId="ADAL" clId="{4FB88970-05DB-46A1-9CD2-4E70D2F5878A}" dt="2025-01-06T15:44:58.238" v="143" actId="1076"/>
-        <pc:sldMkLst>
-          <pc:docMk/>
-          <pc:sldMk cId="3289438449" sldId="318"/>
-        </pc:sldMkLst>
-      </pc:sldChg>
-      <pc:sldChg chg="modNotesTx">
-        <pc:chgData name="MIGUEL TRIGUEROS MUÑOZ" userId="a4ee0321-97d7-430f-98a8-7ed13ff9a4bf" providerId="ADAL" clId="{4FB88970-05DB-46A1-9CD2-4E70D2F5878A}" dt="2025-01-08T18:00:10.103" v="1205" actId="20577"/>
-        <pc:sldMkLst>
-          <pc:docMk/>
-          <pc:sldMk cId="1059083778" sldId="319"/>
-        </pc:sldMkLst>
-      </pc:sldChg>
-      <pc:sldChg chg="ord modNotesTx">
-        <pc:chgData name="MIGUEL TRIGUEROS MUÑOZ" userId="a4ee0321-97d7-430f-98a8-7ed13ff9a4bf" providerId="ADAL" clId="{4FB88970-05DB-46A1-9CD2-4E70D2F5878A}" dt="2025-01-08T18:00:31.267" v="1207"/>
-        <pc:sldMkLst>
-          <pc:docMk/>
-          <pc:sldMk cId="3948044143" sldId="320"/>
-        </pc:sldMkLst>
-      </pc:sldChg>
-      <pc:sldChg chg="modSp mod modNotesTx">
-        <pc:chgData name="MIGUEL TRIGUEROS MUÑOZ" userId="a4ee0321-97d7-430f-98a8-7ed13ff9a4bf" providerId="ADAL" clId="{4FB88970-05DB-46A1-9CD2-4E70D2F5878A}" dt="2025-01-08T17:25:17.221" v="582" actId="20577"/>
-        <pc:sldMkLst>
-          <pc:docMk/>
-          <pc:sldMk cId="675174442" sldId="322"/>
-        </pc:sldMkLst>
-      </pc:sldChg>
-      <pc:sldChg chg="addSp delSp modSp mod modAnim">
-        <pc:chgData name="MIGUEL TRIGUEROS MUÑOZ" userId="a4ee0321-97d7-430f-98a8-7ed13ff9a4bf" providerId="ADAL" clId="{4FB88970-05DB-46A1-9CD2-4E70D2F5878A}" dt="2025-02-06T12:28:05.659" v="1411" actId="13926"/>
-        <pc:sldMkLst>
-          <pc:docMk/>
-          <pc:sldMk cId="94322529" sldId="326"/>
-        </pc:sldMkLst>
-      </pc:sldChg>
-      <pc:sldChg chg="modSp add mod">
-        <pc:chgData name="MIGUEL TRIGUEROS MUÑOZ" userId="a4ee0321-97d7-430f-98a8-7ed13ff9a4bf" providerId="ADAL" clId="{4FB88970-05DB-46A1-9CD2-4E70D2F5878A}" dt="2025-01-27T21:02:08.084" v="1400"/>
-        <pc:sldMkLst>
-          <pc:docMk/>
-          <pc:sldMk cId="2896794478" sldId="348"/>
-        </pc:sldMkLst>
-      </pc:sldChg>
-      <pc:sldChg chg="addSp delSp modSp mod delAnim modAnim">
-        <pc:chgData name="MIGUEL TRIGUEROS MUÑOZ" userId="a4ee0321-97d7-430f-98a8-7ed13ff9a4bf" providerId="ADAL" clId="{4FB88970-05DB-46A1-9CD2-4E70D2F5878A}" dt="2025-01-09T06:59:05.912" v="1271" actId="20577"/>
-        <pc:sldMkLst>
-          <pc:docMk/>
-          <pc:sldMk cId="3660112489" sldId="357"/>
-        </pc:sldMkLst>
-      </pc:sldChg>
-      <pc:sldChg chg="addSp delSp modSp mod delAnim modAnim">
-        <pc:chgData name="MIGUEL TRIGUEROS MUÑOZ" userId="a4ee0321-97d7-430f-98a8-7ed13ff9a4bf" providerId="ADAL" clId="{4FB88970-05DB-46A1-9CD2-4E70D2F5878A}" dt="2025-01-09T06:58:47.786" v="1255" actId="21"/>
-        <pc:sldMkLst>
-          <pc:docMk/>
-          <pc:sldMk cId="3427303393" sldId="358"/>
-        </pc:sldMkLst>
-      </pc:sldChg>
-      <pc:sldChg chg="modSp mod modNotesTx">
-        <pc:chgData name="MIGUEL TRIGUEROS MUÑOZ" userId="a4ee0321-97d7-430f-98a8-7ed13ff9a4bf" providerId="ADAL" clId="{4FB88970-05DB-46A1-9CD2-4E70D2F5878A}" dt="2025-01-06T15:43:27.775" v="140" actId="121"/>
-        <pc:sldMkLst>
-          <pc:docMk/>
-          <pc:sldMk cId="2860104298" sldId="360"/>
-        </pc:sldMkLst>
-      </pc:sldChg>
-      <pc:sldChg chg="modSp mod">
-        <pc:chgData name="MIGUEL TRIGUEROS MUÑOZ" userId="a4ee0321-97d7-430f-98a8-7ed13ff9a4bf" providerId="ADAL" clId="{4FB88970-05DB-46A1-9CD2-4E70D2F5878A}" dt="2025-01-06T15:41:08.789" v="9" actId="27636"/>
-        <pc:sldMkLst>
-          <pc:docMk/>
-          <pc:sldMk cId="2951450419" sldId="363"/>
-        </pc:sldMkLst>
-      </pc:sldChg>
-      <pc:sldChg chg="modSp add mod">
-        <pc:chgData name="MIGUEL TRIGUEROS MUÑOZ" userId="a4ee0321-97d7-430f-98a8-7ed13ff9a4bf" providerId="ADAL" clId="{4FB88970-05DB-46A1-9CD2-4E70D2F5878A}" dt="2025-01-27T21:02:46.061" v="1410" actId="6549"/>
-        <pc:sldMkLst>
-          <pc:docMk/>
-          <pc:sldMk cId="3422367261" sldId="365"/>
-        </pc:sldMkLst>
-      </pc:sldChg>
-      <pc:sldChg chg="modSp add mod">
-        <pc:chgData name="MIGUEL TRIGUEROS MUÑOZ" userId="a4ee0321-97d7-430f-98a8-7ed13ff9a4bf" providerId="ADAL" clId="{4FB88970-05DB-46A1-9CD2-4E70D2F5878A}" dt="2025-01-27T21:01:54.388" v="1399" actId="20577"/>
-        <pc:sldMkLst>
-          <pc:docMk/>
-          <pc:sldMk cId="1115552724" sldId="366"/>
-        </pc:sldMkLst>
-      </pc:sldChg>
-      <pc:sldMasterChg chg="modSp mod">
-        <pc:chgData name="MIGUEL TRIGUEROS MUÑOZ" userId="a4ee0321-97d7-430f-98a8-7ed13ff9a4bf" providerId="ADAL" clId="{4FB88970-05DB-46A1-9CD2-4E70D2F5878A}" dt="2025-01-06T15:41:42.903" v="53" actId="20577"/>
-        <pc:sldMasterMkLst>
-          <pc:docMk/>
-          <pc:sldMasterMk cId="455763939" sldId="2147483686"/>
-        </pc:sldMasterMkLst>
-      </pc:sldMasterChg>
-    </pc:docChg>
-  </pc:docChgLst>
-  <pc:docChgLst>
-    <pc:chgData name="MIGUEL TRIGUEROS MUÑOZ" userId="S::miguel.trigueros@aulaxxi.murciaeduca.es::a4ee0321-97d7-430f-98a8-7ed13ff9a4bf" providerId="AD" clId="Web-{37EB0CCE-FAE1-AA6D-D88F-AC80B5A3445F}"/>
-    <pc:docChg chg="modSld">
-      <pc:chgData name="MIGUEL TRIGUEROS MUÑOZ" userId="S::miguel.trigueros@aulaxxi.murciaeduca.es::a4ee0321-97d7-430f-98a8-7ed13ff9a4bf" providerId="AD" clId="Web-{37EB0CCE-FAE1-AA6D-D88F-AC80B5A3445F}" dt="2025-01-23T10:21:10.158" v="1" actId="14100"/>
-      <pc:docMkLst>
-        <pc:docMk/>
-      </pc:docMkLst>
-      <pc:sldChg chg="modSp">
-        <pc:chgData name="MIGUEL TRIGUEROS MUÑOZ" userId="S::miguel.trigueros@aulaxxi.murciaeduca.es::a4ee0321-97d7-430f-98a8-7ed13ff9a4bf" providerId="AD" clId="Web-{37EB0CCE-FAE1-AA6D-D88F-AC80B5A3445F}" dt="2025-01-23T10:17:45.855" v="0" actId="14100"/>
-        <pc:sldMkLst>
-          <pc:docMk/>
-          <pc:sldMk cId="2538212918" sldId="359"/>
-        </pc:sldMkLst>
-      </pc:sldChg>
-      <pc:sldChg chg="modSp">
-        <pc:chgData name="MIGUEL TRIGUEROS MUÑOZ" userId="S::miguel.trigueros@aulaxxi.murciaeduca.es::a4ee0321-97d7-430f-98a8-7ed13ff9a4bf" providerId="AD" clId="Web-{37EB0CCE-FAE1-AA6D-D88F-AC80B5A3445F}" dt="2025-01-23T10:21:10.158" v="1" actId="14100"/>
-        <pc:sldMkLst>
-          <pc:docMk/>
-          <pc:sldMk cId="3715628655" sldId="369"/>
-        </pc:sldMkLst>
+            <pc:sldMk cId="3660112489" sldId="357"/>
+            <ac:spMk id="3" creationId="{DE2F0576-162F-3C0A-632E-17C18C273623}"/>
+          </ac:spMkLst>
+        </pc:spChg>
+        <pc:spChg chg="mod">
+          <ac:chgData name="MIGUEL TRIGUEROS MUÑOZ" userId="S::miguel.trigueros@aulaxxi.murciaeduca.es::a4ee0321-97d7-430f-98a8-7ed13ff9a4bf" providerId="AD" clId="Web-{059C4535-6492-C8B7-8BC2-029A9EBA194D}" dt="2026-01-09T12:14:59.403" v="22" actId="1076"/>
+          <ac:spMkLst>
+            <pc:docMk/>
+            <pc:sldMk cId="3660112489" sldId="357"/>
+            <ac:spMk id="4" creationId="{8DC2ECA0-BC39-522D-06DD-566A150D6DCD}"/>
+          </ac:spMkLst>
+        </pc:spChg>
+        <pc:graphicFrameChg chg="mod modGraphic">
+          <ac:chgData name="MIGUEL TRIGUEROS MUÑOZ" userId="S::miguel.trigueros@aulaxxi.murciaeduca.es::a4ee0321-97d7-430f-98a8-7ed13ff9a4bf" providerId="AD" clId="Web-{059C4535-6492-C8B7-8BC2-029A9EBA194D}" dt="2026-01-09T12:14:35.480" v="16" actId="1076"/>
+          <ac:graphicFrameMkLst>
+            <pc:docMk/>
+            <pc:sldMk cId="3660112489" sldId="357"/>
+            <ac:graphicFrameMk id="5" creationId="{1F7DFE7F-FBEC-19A9-2FD7-22B2795D0596}"/>
+          </ac:graphicFrameMkLst>
+        </pc:graphicFrameChg>
+        <pc:graphicFrameChg chg="mod modGraphic">
+          <ac:chgData name="MIGUEL TRIGUEROS MUÑOZ" userId="S::miguel.trigueros@aulaxxi.murciaeduca.es::a4ee0321-97d7-430f-98a8-7ed13ff9a4bf" providerId="AD" clId="Web-{059C4535-6492-C8B7-8BC2-029A9EBA194D}" dt="2026-01-09T12:14:47.199" v="19"/>
+          <ac:graphicFrameMkLst>
+            <pc:docMk/>
+            <pc:sldMk cId="3660112489" sldId="357"/>
+            <ac:graphicFrameMk id="14" creationId="{5D827BE9-C4E0-8836-F73E-95EC7D3C1332}"/>
+          </ac:graphicFrameMkLst>
+        </pc:graphicFrameChg>
+        <pc:graphicFrameChg chg="mod modGraphic">
+          <ac:chgData name="MIGUEL TRIGUEROS MUÑOZ" userId="S::miguel.trigueros@aulaxxi.murciaeduca.es::a4ee0321-97d7-430f-98a8-7ed13ff9a4bf" providerId="AD" clId="Web-{059C4535-6492-C8B7-8BC2-029A9EBA194D}" dt="2026-01-09T12:14:53.199" v="21" actId="1076"/>
+          <ac:graphicFrameMkLst>
+            <pc:docMk/>
+            <pc:sldMk cId="3660112489" sldId="357"/>
+            <ac:graphicFrameMk id="15" creationId="{672E4328-B5A1-9A2C-8E89-3E4C13E2528D}"/>
+          </ac:graphicFrameMkLst>
+        </pc:graphicFrameChg>
       </pc:sldChg>
     </pc:docChg>
   </pc:docChgLst>
@@ -1578,8 +371,8 @@
       <pc:docMk xmlns:pc="http://schemas.microsoft.com/office/powerpoint/2013/main/command"/>
       <pc:sldMk xmlns:pc="http://schemas.microsoft.com/office/powerpoint/2013/main/command" cId="3660112489" sldId="357"/>
       <ac:spMk id="3" creationId="{DE2F0576-162F-3C0A-632E-17C18C273623}"/>
-      <ac:txMk cp="352" len="7">
-        <ac:context len="428" hash="3243421071"/>
+      <ac:txMk cp="355" len="7">
+        <ac:context len="431" hash="2559472150"/>
       </ac:txMk>
     </ac:txMkLst>
     <p188:pos x="5928235" y="2321952"/>
@@ -1691,7 +484,7 @@
           <a:p>
             <a:fld id="{BA89FAE3-5837-4C1B-BC4B-90063F16532C}" type="datetimeFigureOut">
               <a:rPr lang="es-ES" smtClean="0"/>
-              <a:t>08/07/2025</a:t>
+              <a:t>16/01/2026</a:t>
             </a:fld>
             <a:endParaRPr lang="es-ES"/>
           </a:p>
@@ -1769,7 +562,7 @@
           <a:p>
             <a:fld id="{BA12C0DB-E44F-4629-AD09-AAD10AC79FDD}" type="slidenum">
               <a:rPr lang="es-ES" smtClean="0"/>
-              <a:t>‹Nº›</a:t>
+              <a:t>‹#›</a:t>
             </a:fld>
             <a:endParaRPr lang="es-ES"/>
           </a:p>
@@ -1868,7 +661,7 @@
           <a:p>
             <a:fld id="{73C425FF-1B7F-4E8F-BB9C-39A442C619BF}" type="datetimeFigureOut">
               <a:rPr lang="es-ES" smtClean="0"/>
-              <a:t>08/07/2025</a:t>
+              <a:t>16/01/2026</a:t>
             </a:fld>
             <a:endParaRPr lang="es-ES"/>
           </a:p>
@@ -2026,7 +819,7 @@
           <a:p>
             <a:fld id="{2B187428-8AF8-455B-BDC9-B299B46AA1EA}" type="slidenum">
               <a:rPr lang="es-ES" smtClean="0"/>
-              <a:t>‹Nº›</a:t>
+              <a:t>‹#›</a:t>
             </a:fld>
             <a:endParaRPr lang="es-ES"/>
           </a:p>
@@ -2180,7 +973,7 @@
           <a:lstStyle/>
           <a:p>
             <a:r>
-              <a:rPr lang="es-ES" sz="1200" b="1" kern="1200" dirty="0">
+              <a:rPr lang="es-ES" sz="1200" b="1" kern="1200">
                 <a:solidFill>
                   <a:schemeClr val="tx1"/>
                 </a:solidFill>
@@ -2192,7 +985,7 @@
               <a:t>P </a:t>
             </a:r>
             <a:r>
-              <a:rPr lang="es-ES" sz="1200" kern="1200" dirty="0">
+              <a:rPr lang="es-ES" sz="1200" kern="1200">
                 <a:solidFill>
                   <a:schemeClr val="tx1"/>
                 </a:solidFill>
@@ -2206,7 +999,7 @@
           </a:p>
           <a:p>
             <a:r>
-              <a:rPr lang="es-ES" dirty="0"/>
+              <a:rPr lang="es-ES"/>
               <a:t>En el módulo de programación deben haber empezado a ver este paradigma</a:t>
             </a:r>
           </a:p>
@@ -2607,7 +1400,7 @@
           <a:bodyPr/>
           <a:lstStyle/>
           <a:p>
-            <a:endParaRPr lang="es-ES" dirty="0"/>
+            <a:endParaRPr lang="es-ES"/>
           </a:p>
         </p:txBody>
       </p:sp>
@@ -2691,7 +1484,7 @@
           <a:bodyPr/>
           <a:lstStyle/>
           <a:p>
-            <a:endParaRPr lang="es-ES" dirty="0"/>
+            <a:endParaRPr lang="es-ES"/>
           </a:p>
         </p:txBody>
       </p:sp>
@@ -2775,7 +1568,7 @@
           <a:bodyPr/>
           <a:lstStyle/>
           <a:p>
-            <a:endParaRPr lang="es-ES" dirty="0"/>
+            <a:endParaRPr lang="es-ES"/>
           </a:p>
         </p:txBody>
       </p:sp>
@@ -3168,7 +1961,19 @@
             </a:r>
             <a:r>
               <a:rPr lang="es-ES" b="1"/>
-              <a:t> enciende() la Lavadora lavadora1</a:t>
+              <a:t> enciende() </a:t>
+            </a:r>
+            <a:r>
+              <a:rPr lang="es-ES" b="1">
+                <a:highlight>
+                  <a:srgbClr val="FFFF00"/>
+                </a:highlight>
+              </a:rPr>
+              <a:t>su</a:t>
+            </a:r>
+            <a:r>
+              <a:rPr lang="es-ES" b="1"/>
+              <a:t> Lavadora lavadora1</a:t>
             </a:r>
             <a:r>
               <a:rPr lang="es-ES"/>
@@ -3396,7 +2201,7 @@
           <a:p>
             <a:r>
               <a:rPr lang="es-ES"/>
-              <a:t>La lavadora de la izquierda tiene elementos en rojo para explicar los siguiente:</a:t>
+              <a:t>La lavadora de la izquierda tiene elementos en rojo para explicar lo siguiente:</a:t>
             </a:r>
           </a:p>
           <a:p>
@@ -3842,6 +2647,13 @@
               <a:schemeClr val="lt1"/>
             </a:fontRef>
           </p:style>
+          <p:txBody>
+            <a:bodyPr/>
+            <a:lstStyle/>
+            <a:p>
+              <a:endParaRPr lang="es-ES"/>
+            </a:p>
+          </p:txBody>
         </p:sp>
         <p:sp>
           <p:nvSpPr>
@@ -3907,6 +2719,13 @@
               <a:schemeClr val="lt1"/>
             </a:fontRef>
           </p:style>
+          <p:txBody>
+            <a:bodyPr/>
+            <a:lstStyle/>
+            <a:p>
+              <a:endParaRPr lang="es-ES"/>
+            </a:p>
+          </p:txBody>
         </p:sp>
         <p:sp>
           <p:nvSpPr>
@@ -3969,6 +2788,13 @@
               <a:schemeClr val="lt1"/>
             </a:fontRef>
           </p:style>
+          <p:txBody>
+            <a:bodyPr/>
+            <a:lstStyle/>
+            <a:p>
+              <a:endParaRPr lang="es-ES"/>
+            </a:p>
+          </p:txBody>
         </p:sp>
         <p:sp>
           <p:nvSpPr>
@@ -4033,6 +2859,13 @@
               <a:schemeClr val="lt1"/>
             </a:fontRef>
           </p:style>
+          <p:txBody>
+            <a:bodyPr/>
+            <a:lstStyle/>
+            <a:p>
+              <a:endParaRPr lang="es-ES"/>
+            </a:p>
+          </p:txBody>
         </p:sp>
         <p:sp>
           <p:nvSpPr>
@@ -4100,6 +2933,13 @@
               <a:schemeClr val="lt1"/>
             </a:fontRef>
           </p:style>
+          <p:txBody>
+            <a:bodyPr/>
+            <a:lstStyle/>
+            <a:p>
+              <a:endParaRPr lang="es-ES"/>
+            </a:p>
+          </p:txBody>
         </p:sp>
         <p:sp>
           <p:nvSpPr>
@@ -4165,6 +3005,13 @@
               <a:schemeClr val="lt1"/>
             </a:fontRef>
           </p:style>
+          <p:txBody>
+            <a:bodyPr/>
+            <a:lstStyle/>
+            <a:p>
+              <a:endParaRPr lang="es-ES"/>
+            </a:p>
+          </p:txBody>
         </p:sp>
         <p:sp>
           <p:nvSpPr>
@@ -4227,6 +3074,13 @@
               <a:schemeClr val="lt1"/>
             </a:fontRef>
           </p:style>
+          <p:txBody>
+            <a:bodyPr/>
+            <a:lstStyle/>
+            <a:p>
+              <a:endParaRPr lang="es-ES"/>
+            </a:p>
+          </p:txBody>
         </p:sp>
         <p:sp>
           <p:nvSpPr>
@@ -4290,6 +3144,13 @@
               <a:schemeClr val="lt1"/>
             </a:fontRef>
           </p:style>
+          <p:txBody>
+            <a:bodyPr/>
+            <a:lstStyle/>
+            <a:p>
+              <a:endParaRPr lang="es-ES"/>
+            </a:p>
+          </p:txBody>
         </p:sp>
       </p:grpSp>
       <p:sp>
@@ -4481,7 +3342,7 @@
             <a:fld id="{B6F15528-21DE-4FAA-801E-634DDDAF4B2B}" type="slidenum">
               <a:rPr lang="es-ES" smtClean="0"/>
               <a:pPr/>
-              <a:t>‹Nº›</a:t>
+              <a:t>‹#›</a:t>
             </a:fld>
             <a:endParaRPr lang="es-ES"/>
           </a:p>
@@ -5270,7 +4131,7 @@
           <a:p>
             <a:fld id="{ACB1A6C2-4497-4021-B992-BC7E2DD17ECA}" type="datetime1">
               <a:rPr lang="en-US" smtClean="0"/>
-              <a:t>7/8/2025</a:t>
+              <a:t>1/16/2026</a:t>
             </a:fld>
             <a:endParaRPr lang="en-US"/>
           </a:p>
@@ -5333,7 +4194,7 @@
             <a:fld id="{B6F15528-21DE-4FAA-801E-634DDDAF4B2B}" type="slidenum">
               <a:rPr lang="es-ES" smtClean="0"/>
               <a:pPr/>
-              <a:t>‹Nº›</a:t>
+              <a:t>‹#›</a:t>
             </a:fld>
             <a:endParaRPr lang="es-ES"/>
           </a:p>
@@ -5415,7 +4276,7 @@
             <a:fld id="{B6F15528-21DE-4FAA-801E-634DDDAF4B2B}" type="slidenum">
               <a:rPr lang="es-ES" smtClean="0"/>
               <a:pPr/>
-              <a:t>‹Nº›</a:t>
+              <a:t>‹#›</a:t>
             </a:fld>
             <a:endParaRPr lang="es-ES"/>
           </a:p>
@@ -5604,7 +4465,7 @@
             <a:fld id="{B6F15528-21DE-4FAA-801E-634DDDAF4B2B}" type="slidenum">
               <a:rPr lang="es-ES" smtClean="0"/>
               <a:pPr/>
-              <a:t>‹Nº›</a:t>
+              <a:t>‹#›</a:t>
             </a:fld>
             <a:endParaRPr lang="es-ES"/>
           </a:p>
@@ -5844,7 +4705,7 @@
             <a:fld id="{B6F15528-21DE-4FAA-801E-634DDDAF4B2B}" type="slidenum">
               <a:rPr lang="es-ES" smtClean="0"/>
               <a:pPr/>
-              <a:t>‹Nº›</a:t>
+              <a:t>‹#›</a:t>
             </a:fld>
             <a:endParaRPr lang="es-ES"/>
           </a:p>
@@ -6139,7 +5000,7 @@
             <a:fld id="{B6F15528-21DE-4FAA-801E-634DDDAF4B2B}" type="slidenum">
               <a:rPr lang="es-ES" smtClean="0"/>
               <a:pPr/>
-              <a:t>‹Nº›</a:t>
+              <a:t>‹#›</a:t>
             </a:fld>
             <a:endParaRPr lang="es-ES"/>
           </a:p>
@@ -6521,7 +5382,7 @@
           <a:p>
             <a:fld id="{F3DA8F42-B3BB-41A1-AB4E-8617CD9BC174}" type="datetime1">
               <a:rPr lang="en-US" smtClean="0"/>
-              <a:t>7/8/2025</a:t>
+              <a:t>1/16/2026</a:t>
             </a:fld>
             <a:endParaRPr lang="en-US"/>
           </a:p>
@@ -6571,7 +5432,7 @@
           <a:p>
             <a:fld id="{B6F15528-21DE-4FAA-801E-634DDDAF4B2B}" type="slidenum">
               <a:rPr lang="es-ES" smtClean="0"/>
-              <a:t>‹Nº›</a:t>
+              <a:t>‹#›</a:t>
             </a:fld>
             <a:endParaRPr lang="es-ES"/>
           </a:p>
@@ -6916,7 +5777,7 @@
           <a:p>
             <a:fld id="{EC685CC9-6004-4391-A195-A2D4DFB5034A}" type="datetime1">
               <a:rPr lang="en-US" smtClean="0"/>
-              <a:t>7/8/2025</a:t>
+              <a:t>1/16/2026</a:t>
             </a:fld>
             <a:endParaRPr lang="en-US"/>
           </a:p>
@@ -6966,7 +5827,7 @@
           <a:p>
             <a:fld id="{B6F15528-21DE-4FAA-801E-634DDDAF4B2B}" type="slidenum">
               <a:rPr lang="es-ES" smtClean="0"/>
-              <a:t>‹Nº›</a:t>
+              <a:t>‹#›</a:t>
             </a:fld>
             <a:endParaRPr lang="es-ES"/>
           </a:p>
@@ -7094,7 +5955,7 @@
           <a:p>
             <a:fld id="{D9542DED-1971-464D-AC83-85410DCF904F}" type="datetime1">
               <a:rPr lang="en-US" smtClean="0"/>
-              <a:t>7/8/2025</a:t>
+              <a:t>1/16/2026</a:t>
             </a:fld>
             <a:endParaRPr lang="en-US"/>
           </a:p>
@@ -7136,7 +5997,7 @@
           <a:p>
             <a:fld id="{B6F15528-21DE-4FAA-801E-634DDDAF4B2B}" type="slidenum">
               <a:rPr lang="es-ES" smtClean="0"/>
-              <a:t>‹Nº›</a:t>
+              <a:t>‹#›</a:t>
             </a:fld>
             <a:endParaRPr lang="es-ES"/>
           </a:p>
@@ -7262,7 +6123,7 @@
           <a:p>
             <a:fld id="{7D441FF4-63D7-4E0C-B192-FD104AB33BF2}" type="datetime1">
               <a:rPr lang="en-US" smtClean="0"/>
-              <a:t>7/8/2025</a:t>
+              <a:t>1/16/2026</a:t>
             </a:fld>
             <a:endParaRPr lang="en-US"/>
           </a:p>
@@ -7304,7 +6165,7 @@
           <a:p>
             <a:fld id="{80F073CC-40D5-4B23-8DF0-9BD0A0C12F2C}" type="slidenum">
               <a:rPr lang="en-US" smtClean="0"/>
-              <a:t>‹Nº›</a:t>
+              <a:t>‹#›</a:t>
             </a:fld>
             <a:endParaRPr lang="en-US"/>
           </a:p>
@@ -7420,6 +6281,13 @@
               <a:schemeClr val="lt1"/>
             </a:fontRef>
           </p:style>
+          <p:txBody>
+            <a:bodyPr/>
+            <a:lstStyle/>
+            <a:p>
+              <a:endParaRPr lang="es-ES"/>
+            </a:p>
+          </p:txBody>
         </p:sp>
         <p:cxnSp>
           <p:nvCxnSpPr>
@@ -7559,6 +6427,13 @@
               <a:schemeClr val="lt1"/>
             </a:fontRef>
           </p:style>
+          <p:txBody>
+            <a:bodyPr/>
+            <a:lstStyle/>
+            <a:p>
+              <a:endParaRPr lang="es-ES"/>
+            </a:p>
+          </p:txBody>
         </p:sp>
         <p:sp>
           <p:nvSpPr>
@@ -7624,6 +6499,13 @@
               <a:schemeClr val="lt1"/>
             </a:fontRef>
           </p:style>
+          <p:txBody>
+            <a:bodyPr/>
+            <a:lstStyle/>
+            <a:p>
+              <a:endParaRPr lang="es-ES"/>
+            </a:p>
+          </p:txBody>
         </p:sp>
         <p:sp>
           <p:nvSpPr>
@@ -7686,6 +6568,13 @@
               <a:schemeClr val="lt1"/>
             </a:fontRef>
           </p:style>
+          <p:txBody>
+            <a:bodyPr/>
+            <a:lstStyle/>
+            <a:p>
+              <a:endParaRPr lang="es-ES"/>
+            </a:p>
+          </p:txBody>
         </p:sp>
         <p:sp>
           <p:nvSpPr>
@@ -7750,6 +6639,13 @@
               <a:schemeClr val="lt1"/>
             </a:fontRef>
           </p:style>
+          <p:txBody>
+            <a:bodyPr/>
+            <a:lstStyle/>
+            <a:p>
+              <a:endParaRPr lang="es-ES"/>
+            </a:p>
+          </p:txBody>
         </p:sp>
         <p:sp>
           <p:nvSpPr>
@@ -7817,6 +6713,13 @@
               <a:schemeClr val="lt1"/>
             </a:fontRef>
           </p:style>
+          <p:txBody>
+            <a:bodyPr/>
+            <a:lstStyle/>
+            <a:p>
+              <a:endParaRPr lang="es-ES"/>
+            </a:p>
+          </p:txBody>
         </p:sp>
         <p:sp>
           <p:nvSpPr>
@@ -7882,6 +6785,13 @@
               <a:schemeClr val="lt1"/>
             </a:fontRef>
           </p:style>
+          <p:txBody>
+            <a:bodyPr/>
+            <a:lstStyle/>
+            <a:p>
+              <a:endParaRPr lang="es-ES"/>
+            </a:p>
+          </p:txBody>
         </p:sp>
         <p:sp>
           <p:nvSpPr>
@@ -7944,6 +6854,13 @@
               <a:schemeClr val="lt1"/>
             </a:fontRef>
           </p:style>
+          <p:txBody>
+            <a:bodyPr/>
+            <a:lstStyle/>
+            <a:p>
+              <a:endParaRPr lang="es-ES"/>
+            </a:p>
+          </p:txBody>
         </p:sp>
       </p:grpSp>
       <p:sp>
@@ -8077,7 +6994,7 @@
             <a:fld id="{B6F15528-21DE-4FAA-801E-634DDDAF4B2B}" type="slidenum">
               <a:rPr lang="es-ES" smtClean="0"/>
               <a:pPr/>
-              <a:t>‹Nº›</a:t>
+              <a:t>‹#›</a:t>
             </a:fld>
             <a:endParaRPr lang="es-ES"/>
           </a:p>
@@ -8189,10 +7106,10 @@
           </a:lstStyle>
           <a:p>
             <a:r>
-              <a:rPr lang="es-ES" sz="800" dirty="0"/>
+              <a:rPr lang="es-ES" sz="800"/>
               <a:t>UT 7 Programación Orientada a Objetos</a:t>
             </a:r>
-            <a:endParaRPr lang="en-US" sz="800" dirty="0"/>
+            <a:endParaRPr lang="en-US" sz="800"/>
           </a:p>
         </p:txBody>
       </p:sp>
@@ -8708,7 +7625,7 @@
           <a:p>
             <a:pPr algn="l"/>
             <a:r>
-              <a:rPr lang="es-ES" dirty="0"/>
+              <a:rPr lang="es-ES"/>
               <a:t>UT 7: PROGRAMACIÓN ORIENTADA A OBJETOS</a:t>
             </a:r>
           </a:p>
@@ -8777,7 +7694,7 @@
               </a:lnSpc>
             </a:pPr>
             <a:r>
-              <a:rPr lang="es-ES" sz="1400" dirty="0">
+              <a:rPr lang="es-ES" sz="1400">
                 <a:solidFill>
                   <a:schemeClr val="accent4"/>
                 </a:solidFill>
@@ -8787,7 +7704,7 @@
               <a:t>Entornos</a:t>
             </a:r>
             <a:r>
-              <a:rPr lang="es-ES" sz="1400" spc="25" dirty="0">
+              <a:rPr lang="es-ES" sz="1400" spc="25">
                 <a:solidFill>
                   <a:schemeClr val="accent4"/>
                 </a:solidFill>
@@ -8797,7 +7714,7 @@
               <a:t> </a:t>
             </a:r>
             <a:r>
-              <a:rPr lang="es-ES" sz="1400" dirty="0">
+              <a:rPr lang="es-ES" sz="1400">
                 <a:solidFill>
                   <a:schemeClr val="accent4"/>
                 </a:solidFill>
@@ -8807,7 +7724,7 @@
               <a:t>de</a:t>
             </a:r>
             <a:r>
-              <a:rPr lang="es-ES" sz="1400" spc="10" dirty="0">
+              <a:rPr lang="es-ES" sz="1400" spc="10">
                 <a:solidFill>
                   <a:schemeClr val="accent4"/>
                 </a:solidFill>
@@ -8817,7 +7734,7 @@
               <a:t> </a:t>
             </a:r>
             <a:r>
-              <a:rPr lang="es-ES" sz="1400" dirty="0">
+              <a:rPr lang="es-ES" sz="1400">
                 <a:solidFill>
                   <a:schemeClr val="accent4"/>
                 </a:solidFill>
@@ -8827,7 +7744,7 @@
               <a:t>Desarrollo</a:t>
             </a:r>
             <a:r>
-              <a:rPr lang="es-ES" sz="1400" spc="-13" dirty="0">
+              <a:rPr lang="es-ES" sz="1400" spc="-13">
                 <a:solidFill>
                   <a:schemeClr val="accent4"/>
                 </a:solidFill>
@@ -8836,7 +7753,7 @@
               </a:rPr>
               <a:t> </a:t>
             </a:r>
-            <a:endParaRPr lang="es-ES" sz="1400" dirty="0">
+            <a:endParaRPr lang="es-ES" sz="1400">
               <a:solidFill>
                 <a:schemeClr val="accent4"/>
               </a:solidFill>
@@ -8851,7 +7768,7 @@
               </a:lnSpc>
             </a:pPr>
             <a:r>
-              <a:rPr lang="es-ES" sz="1400" dirty="0">
+              <a:rPr lang="es-ES" sz="1400">
                 <a:solidFill>
                   <a:schemeClr val="accent4"/>
                 </a:solidFill>
@@ -8867,7 +7784,7 @@
                 <a:spcPts val="2144"/>
               </a:lnSpc>
             </a:pPr>
-            <a:endParaRPr sz="1400" dirty="0">
+            <a:endParaRPr sz="1400">
               <a:solidFill>
                 <a:schemeClr val="accent4"/>
               </a:solidFill>
@@ -12797,14 +11714,14 @@
           <p:nvPr>
             <p:extLst>
               <p:ext uri="{D42A27DB-BD31-4B8C-83A1-F6EECF244321}">
-                <p14:modId xmlns:p14="http://schemas.microsoft.com/office/powerpoint/2010/main" val="3550818720"/>
+                <p14:modId xmlns:p14="http://schemas.microsoft.com/office/powerpoint/2010/main" val="614030120"/>
               </p:ext>
             </p:extLst>
           </p:nvPr>
         </p:nvGraphicFramePr>
         <p:xfrm>
-          <a:off x="3845033" y="2569122"/>
-          <a:ext cx="1800200" cy="1719756"/>
+          <a:off x="3637280" y="2569122"/>
+          <a:ext cx="2007953" cy="1719756"/>
         </p:xfrm>
         <a:graphic>
           <a:graphicData uri="http://schemas.openxmlformats.org/drawingml/2006/table">
@@ -12813,7 +11730,7 @@
                 <a:tableStyleId>{5C22544A-7EE6-4342-B048-85BDC9FD1C3A}</a:tableStyleId>
               </a:tblPr>
               <a:tblGrid>
-                <a:gridCol w="1800200">
+                <a:gridCol w="2007953">
                   <a:extLst>
                     <a:ext uri="{9D8B030D-6E8A-4147-A177-3AD203B41FA5}">
                       <a16:colId xmlns:a16="http://schemas.microsoft.com/office/drawing/2014/main" val="1436542043"/>
@@ -12895,6 +11812,16 @@
                   <a:txBody>
                     <a:bodyPr/>
                     <a:lstStyle/>
+                    <a:p>
+                      <a:r>
+                        <a:rPr lang="es-ES" sz="1400" err="1"/>
+                        <a:t>String</a:t>
+                      </a:r>
+                      <a:r>
+                        <a:rPr lang="es-ES" sz="1400"/>
+                        <a:t>: nombre</a:t>
+                      </a:r>
+                    </a:p>
                     <a:p>
                       <a:r>
                         <a:rPr lang="es-ES" sz="1400"/>
@@ -13704,41 +12631,30 @@
           </a:bodyPr>
           <a:lstStyle/>
           <a:p>
-            <a:endParaRPr lang="es-ES" dirty="0"/>
+            <a:endParaRPr lang="es-ES"/>
           </a:p>
           <a:p>
             <a:pPr lvl="1"/>
             <a:r>
-              <a:rPr lang="es-ES" dirty="0"/>
+              <a:rPr lang="es-ES"/>
               <a:t>Método especial que instancia el objeto</a:t>
             </a:r>
           </a:p>
           <a:p>
             <a:pPr lvl="1"/>
             <a:r>
-              <a:rPr lang="es-ES" dirty="0"/>
+              <a:rPr lang="es-ES"/>
               <a:t>Existe siempre uno por defecto</a:t>
             </a:r>
           </a:p>
           <a:p>
-            <a:pPr lvl="2"/>
-            <a:r>
-              <a:rPr lang="es-ES" dirty="0">
-                <a:highlight>
-                  <a:srgbClr val="FFFF00"/>
-                </a:highlight>
-              </a:rPr>
-              <a:t>(que es eliminado si escribo yo otro)</a:t>
-            </a:r>
-          </a:p>
-          <a:p>
             <a:pPr lvl="1"/>
             <a:r>
-              <a:rPr lang="es-ES" dirty="0"/>
+              <a:rPr lang="es-ES"/>
               <a:t>Podemos añadir nuevos </a:t>
             </a:r>
             <a:r>
-              <a:rPr lang="es-ES" dirty="0">
+              <a:rPr lang="es-ES">
                 <a:highlight>
                   <a:srgbClr val="FFFF00"/>
                 </a:highlight>
@@ -13746,19 +12662,19 @@
               <a:t>constructores</a:t>
             </a:r>
             <a:r>
-              <a:rPr lang="es-ES" dirty="0"/>
+              <a:rPr lang="es-ES"/>
               <a:t> (</a:t>
             </a:r>
             <a:r>
-              <a:rPr lang="es-ES" i="1" dirty="0"/>
+              <a:rPr lang="es-ES" i="1"/>
               <a:t>sobrecarga</a:t>
             </a:r>
             <a:r>
-              <a:rPr lang="es-ES" dirty="0"/>
+              <a:rPr lang="es-ES"/>
               <a:t>) </a:t>
             </a:r>
             <a:r>
-              <a:rPr lang="es-ES" b="1" dirty="0" err="1">
+              <a:rPr lang="es-ES" b="1" err="1">
                 <a:solidFill>
                   <a:schemeClr val="accent4"/>
                 </a:solidFill>
@@ -13766,7 +12682,7 @@
               <a:t>git</a:t>
             </a:r>
             <a:r>
-              <a:rPr lang="es-ES" b="1" dirty="0">
+              <a:rPr lang="es-ES" b="1">
                 <a:solidFill>
                   <a:schemeClr val="accent4"/>
                 </a:solidFill>
@@ -13776,19 +12692,40 @@
           </a:p>
           <a:p>
             <a:pPr lvl="2"/>
-            <a:endParaRPr lang="es-ES" dirty="0"/>
+            <a:r>
+              <a:rPr lang="es-ES">
+                <a:highlight>
+                  <a:srgbClr val="FFFF00"/>
+                </a:highlight>
+              </a:rPr>
+              <a:t>(Cuando añadimos un constructor, desactivamos el constructor por defecto)</a:t>
+            </a:r>
+          </a:p>
+          <a:p>
+            <a:pPr marL="914400" lvl="2" indent="0">
+              <a:buNone/>
+            </a:pPr>
+            <a:endParaRPr lang="es-ES" b="1">
+              <a:solidFill>
+                <a:schemeClr val="accent4"/>
+              </a:solidFill>
+            </a:endParaRPr>
           </a:p>
           <a:p>
             <a:pPr lvl="2"/>
-            <a:endParaRPr lang="es-ES" dirty="0"/>
+            <a:endParaRPr lang="es-ES"/>
           </a:p>
           <a:p>
             <a:pPr lvl="2"/>
-            <a:endParaRPr lang="es-ES" dirty="0"/>
+            <a:endParaRPr lang="es-ES"/>
           </a:p>
           <a:p>
             <a:pPr lvl="2"/>
-            <a:endParaRPr lang="es-ES" dirty="0"/>
+            <a:endParaRPr lang="es-ES"/>
+          </a:p>
+          <a:p>
+            <a:pPr lvl="2"/>
+            <a:endParaRPr lang="es-ES"/>
           </a:p>
         </p:txBody>
       </p:sp>
@@ -13844,7 +12781,7 @@
           <a:lstStyle/>
           <a:p>
             <a:r>
-              <a:rPr lang="es-ES" dirty="0"/>
+              <a:rPr lang="es-ES"/>
               <a:t>Constructor</a:t>
             </a:r>
           </a:p>
@@ -14304,7 +13241,7 @@
                     <a:lstStyle/>
                     <a:p>
                       <a:r>
-                        <a:rPr lang="es-ES" sz="1400" dirty="0">
+                        <a:rPr lang="es-ES" sz="1400">
                           <a:highlight>
                             <a:srgbClr val="FFFF00"/>
                           </a:highlight>
@@ -14314,7 +13251,7 @@
                     </a:p>
                     <a:p>
                       <a:r>
-                        <a:rPr lang="es-ES" sz="1400" dirty="0">
+                        <a:rPr lang="es-ES" sz="1400">
                           <a:highlight>
                             <a:srgbClr val="FFFF00"/>
                           </a:highlight>
@@ -14324,13 +13261,13 @@
                     </a:p>
                     <a:p>
                       <a:r>
-                        <a:rPr lang="es-ES" sz="1400" dirty="0"/>
+                        <a:rPr lang="es-ES" sz="1400"/>
                         <a:t>encender()</a:t>
                       </a:r>
                     </a:p>
                     <a:p>
                       <a:r>
-                        <a:rPr lang="es-ES" sz="1400" dirty="0"/>
+                        <a:rPr lang="es-ES" sz="1400"/>
                         <a:t>apagar()</a:t>
                       </a:r>
                     </a:p>
@@ -14446,7 +13383,7 @@
         <p:spPr>
           <a:xfrm>
             <a:off x="3414433" y="4086355"/>
-            <a:ext cx="1451038" cy="246221"/>
+            <a:ext cx="1619354" cy="246221"/>
           </a:xfrm>
           <a:prstGeom prst="rect">
             <a:avLst/>
@@ -14460,6 +13397,16 @@
           <a:lstStyle/>
           <a:p>
             <a:r>
+              <a:rPr lang="es-ES" sz="1000" err="1">
+                <a:solidFill>
+                  <a:schemeClr val="accent6">
+                    <a:lumMod val="50000"/>
+                  </a:schemeClr>
+                </a:solidFill>
+              </a:rPr>
+              <a:t>lavadoraCasa.encender</a:t>
+            </a:r>
+            <a:r>
               <a:rPr lang="es-ES" sz="1000">
                 <a:solidFill>
                   <a:schemeClr val="accent6">
@@ -14467,7 +13414,7 @@
                   </a:schemeClr>
                 </a:solidFill>
               </a:rPr>
-              <a:t>lavadora1.encender()</a:t>
+              <a:t>()</a:t>
             </a:r>
           </a:p>
         </p:txBody>
@@ -14543,76 +13490,6 @@
               </a:rPr>
               <a:t>Atributos - estado</a:t>
             </a:r>
-          </a:p>
-        </p:txBody>
-      </p:sp>
-      <p:sp>
-        <p:nvSpPr>
-          <p:cNvPr id="7" name="CuadroTexto 6">
-            <a:extLst>
-              <a:ext uri="{FF2B5EF4-FFF2-40B4-BE49-F238E27FC236}">
-                <a16:creationId xmlns:a16="http://schemas.microsoft.com/office/drawing/2014/main" id="{96DD68C5-5195-6A44-79EA-78FA990B8EC6}"/>
-              </a:ext>
-            </a:extLst>
-          </p:cNvPr>
-          <p:cNvSpPr txBox="1"/>
-          <p:nvPr/>
-        </p:nvSpPr>
-        <p:spPr>
-          <a:xfrm>
-            <a:off x="6169152" y="1491435"/>
-            <a:ext cx="2555389" cy="1477328"/>
-          </a:xfrm>
-          <a:prstGeom prst="rect">
-            <a:avLst/>
-          </a:prstGeom>
-          <a:noFill/>
-        </p:spPr>
-        <p:txBody>
-          <a:bodyPr wrap="square" rtlCol="0">
-            <a:spAutoFit/>
-          </a:bodyPr>
-          <a:lstStyle/>
-          <a:p>
-            <a:r>
-              <a:rPr lang="es-ES" dirty="0">
-                <a:solidFill>
-                  <a:srgbClr val="FF0000"/>
-                </a:solidFill>
-              </a:rPr>
-              <a:t>Propuesta:</a:t>
-            </a:r>
-          </a:p>
-          <a:p>
-            <a:r>
-              <a:rPr lang="es-ES" dirty="0">
-                <a:solidFill>
-                  <a:srgbClr val="FF0000"/>
-                </a:solidFill>
-              </a:rPr>
-              <a:t>probar en </a:t>
-            </a:r>
-            <a:r>
-              <a:rPr lang="es-ES" dirty="0" err="1">
-                <a:solidFill>
-                  <a:srgbClr val="FF0000"/>
-                </a:solidFill>
-              </a:rPr>
-              <a:t>inteliJ</a:t>
-            </a:r>
-            <a:r>
-              <a:rPr lang="es-ES" dirty="0">
-                <a:solidFill>
-                  <a:srgbClr val="FF0000"/>
-                </a:solidFill>
-              </a:rPr>
-              <a:t> la creación de alguna de estas clases o del repositorio</a:t>
-            </a:r>
-            <a:endParaRPr lang="es-ES" b="1" dirty="0">
-              <a:solidFill>
-                <a:srgbClr val="FF0000"/>
-              </a:solidFill>
-            </a:endParaRPr>
           </a:p>
         </p:txBody>
       </p:sp>
@@ -14736,105 +13613,6 @@
                       </p:childTnLst>
                     </p:cTn>
                   </p:par>
-                  <p:par>
-                    <p:cTn id="10" fill="hold">
-                      <p:stCondLst>
-                        <p:cond delay="indefinite"/>
-                      </p:stCondLst>
-                      <p:childTnLst>
-                        <p:par>
-                          <p:cTn id="11" fill="hold">
-                            <p:stCondLst>
-                              <p:cond delay="0"/>
-                            </p:stCondLst>
-                            <p:childTnLst>
-                              <p:par>
-                                <p:cTn id="12" presetID="53" presetClass="entr" presetSubtype="16" fill="hold" grpId="0" nodeType="clickEffect">
-                                  <p:stCondLst>
-                                    <p:cond delay="0"/>
-                                  </p:stCondLst>
-                                  <p:childTnLst>
-                                    <p:set>
-                                      <p:cBhvr>
-                                        <p:cTn id="13" dur="1" fill="hold">
-                                          <p:stCondLst>
-                                            <p:cond delay="0"/>
-                                          </p:stCondLst>
-                                        </p:cTn>
-                                        <p:tgtEl>
-                                          <p:spTgt spid="7"/>
-                                        </p:tgtEl>
-                                        <p:attrNameLst>
-                                          <p:attrName>style.visibility</p:attrName>
-                                        </p:attrNameLst>
-                                      </p:cBhvr>
-                                      <p:to>
-                                        <p:strVal val="visible"/>
-                                      </p:to>
-                                    </p:set>
-                                    <p:anim calcmode="lin" valueType="num">
-                                      <p:cBhvr>
-                                        <p:cTn id="14" dur="500" fill="hold"/>
-                                        <p:tgtEl>
-                                          <p:spTgt spid="7"/>
-                                        </p:tgtEl>
-                                        <p:attrNameLst>
-                                          <p:attrName>ppt_w</p:attrName>
-                                        </p:attrNameLst>
-                                      </p:cBhvr>
-                                      <p:tavLst>
-                                        <p:tav tm="0">
-                                          <p:val>
-                                            <p:fltVal val="0"/>
-                                          </p:val>
-                                        </p:tav>
-                                        <p:tav tm="100000">
-                                          <p:val>
-                                            <p:strVal val="#ppt_w"/>
-                                          </p:val>
-                                        </p:tav>
-                                      </p:tavLst>
-                                    </p:anim>
-                                    <p:anim calcmode="lin" valueType="num">
-                                      <p:cBhvr>
-                                        <p:cTn id="15" dur="500" fill="hold"/>
-                                        <p:tgtEl>
-                                          <p:spTgt spid="7"/>
-                                        </p:tgtEl>
-                                        <p:attrNameLst>
-                                          <p:attrName>ppt_h</p:attrName>
-                                        </p:attrNameLst>
-                                      </p:cBhvr>
-                                      <p:tavLst>
-                                        <p:tav tm="0">
-                                          <p:val>
-                                            <p:fltVal val="0"/>
-                                          </p:val>
-                                        </p:tav>
-                                        <p:tav tm="100000">
-                                          <p:val>
-                                            <p:strVal val="#ppt_h"/>
-                                          </p:val>
-                                        </p:tav>
-                                      </p:tavLst>
-                                    </p:anim>
-                                    <p:animEffect transition="in" filter="fade">
-                                      <p:cBhvr>
-                                        <p:cTn id="16" dur="500"/>
-                                        <p:tgtEl>
-                                          <p:spTgt spid="7"/>
-                                        </p:tgtEl>
-                                      </p:cBhvr>
-                                    </p:animEffect>
-                                  </p:childTnLst>
-                                </p:cTn>
-                              </p:par>
-                            </p:childTnLst>
-                          </p:cTn>
-                        </p:par>
-                      </p:childTnLst>
-                    </p:cTn>
-                  </p:par>
                 </p:childTnLst>
               </p:cTn>
               <p:prevCondLst>
@@ -14858,7 +13636,6 @@
     </p:tnLst>
     <p:bldLst>
       <p:bldP spid="4" grpId="0"/>
-      <p:bldP spid="7" grpId="0"/>
     </p:bldLst>
   </p:timing>
 </p:sld>
@@ -15085,7 +13862,7 @@
           <a:lstStyle/>
           <a:p>
             <a:r>
-              <a:rPr lang="es-ES" sz="1800" kern="1200" dirty="0">
+              <a:rPr lang="es-ES" sz="1800" kern="1200">
                 <a:solidFill>
                   <a:schemeClr val="accent2">
                     <a:lumMod val="50000"/>
@@ -15098,27 +13875,27 @@
               </a:rPr>
               <a:t>Abstracción</a:t>
             </a:r>
-            <a:endParaRPr lang="es-ES" dirty="0"/>
+            <a:endParaRPr lang="es-ES"/>
           </a:p>
           <a:p>
             <a:pPr lvl="1"/>
             <a:r>
-              <a:rPr lang="es-ES" dirty="0"/>
+              <a:rPr lang="es-ES"/>
               <a:t>Modelo</a:t>
             </a:r>
             <a:r>
-              <a:rPr lang="es-ES" baseline="0" dirty="0"/>
+              <a:rPr lang="es-ES" baseline="0"/>
               <a:t> un objeto del mundo real</a:t>
             </a:r>
           </a:p>
           <a:p>
             <a:pPr lvl="1"/>
             <a:r>
-              <a:rPr lang="es-ES" baseline="0" dirty="0"/>
+              <a:rPr lang="es-ES" baseline="0"/>
               <a:t>Se seleccionan </a:t>
             </a:r>
             <a:r>
-              <a:rPr lang="es-ES" b="1" baseline="0" dirty="0">
+              <a:rPr lang="es-ES" b="1" baseline="0">
                 <a:solidFill>
                   <a:schemeClr val="accent4"/>
                 </a:solidFill>
@@ -15126,14 +13903,14 @@
               <a:t>ciertas</a:t>
             </a:r>
             <a:r>
-              <a:rPr lang="es-ES" baseline="0" dirty="0"/>
+              <a:rPr lang="es-ES" baseline="0"/>
               <a:t> características</a:t>
             </a:r>
           </a:p>
           <a:p>
             <a:pPr lvl="1"/>
             <a:r>
-              <a:rPr lang="es-ES" dirty="0"/>
+              <a:rPr lang="es-ES"/>
               <a:t>Dependiendo del contexto (análisis, casos de uso, requisitos…)</a:t>
             </a:r>
           </a:p>
@@ -15163,7 +13940,7 @@
           <a:lstStyle/>
           <a:p>
             <a:r>
-              <a:rPr lang="es-ES" dirty="0"/>
+              <a:rPr lang="es-ES"/>
               <a:t>5. CARACTERÍSTICAS TAREA ED5a0701 </a:t>
             </a:r>
           </a:p>
@@ -16104,102 +14881,127 @@
             <p:ph type="body" sz="quarter" idx="14"/>
           </p:nvPr>
         </p:nvSpPr>
-        <p:spPr/>
+        <p:spPr>
+          <a:xfrm>
+            <a:off x="91350" y="1329119"/>
+            <a:ext cx="7081808" cy="3595913"/>
+          </a:xfrm>
+        </p:spPr>
         <p:txBody>
-          <a:bodyPr numCol="2">
+          <a:bodyPr vert="horz" lIns="91440" tIns="45720" rIns="91440" bIns="45720" numCol="2" rtlCol="0" anchor="t">
             <a:normAutofit/>
           </a:bodyPr>
           <a:lstStyle/>
           <a:p>
             <a:pPr lvl="1"/>
             <a:r>
-              <a:rPr lang="es-ES"/>
-              <a:t>Los objetos de una clase pueden ver o no los atributos de otra</a:t>
+              <a:rPr lang="es-ES" sz="1400"/>
+              <a:t>Los objetos de una clase pueden </a:t>
+            </a:r>
+            <a:r>
+              <a:rPr lang="es-ES" sz="1050"/>
+              <a:t>ver</a:t>
+            </a:r>
+            <a:r>
+              <a:rPr lang="es-ES" sz="1400"/>
+              <a:t> o no los atributos de otra</a:t>
             </a:r>
           </a:p>
           <a:p>
             <a:pPr lvl="1"/>
             <a:r>
-              <a:rPr lang="es-ES"/>
+              <a:rPr lang="es-ES" sz="1400"/>
               <a:t>El acceso a los atributos y métodos de un objeto está restringido según unos criterios:</a:t>
             </a:r>
           </a:p>
           <a:p>
             <a:pPr lvl="2"/>
             <a:r>
-              <a:rPr lang="es-ES" err="1"/>
+              <a:rPr lang="es-ES" sz="1200" err="1"/>
               <a:t>git</a:t>
             </a:r>
             <a:r>
-              <a:rPr lang="es-ES"/>
+              <a:rPr lang="es-ES" sz="1200"/>
               <a:t> </a:t>
             </a:r>
           </a:p>
           <a:p>
             <a:pPr lvl="1"/>
             <a:r>
-              <a:rPr lang="es-ES"/>
+              <a:rPr lang="es-ES" sz="1400"/>
               <a:t>A continuación, se muestran los modificadores de visibilidad en java junto a su símbolo UML:</a:t>
             </a:r>
           </a:p>
           <a:p>
+            <a:pPr lvl="1"/>
+            <a:endParaRPr lang="es-ES" sz="1400"/>
+          </a:p>
+          <a:p>
+            <a:pPr lvl="1"/>
+            <a:endParaRPr lang="es-ES" sz="1400"/>
+          </a:p>
+          <a:p>
+            <a:pPr lvl="1"/>
+            <a:endParaRPr lang="es-ES" sz="1400"/>
+          </a:p>
+          <a:p>
             <a:pPr lvl="2"/>
             <a:r>
-              <a:rPr lang="es-ES"/>
+              <a:rPr lang="es-ES" sz="1200"/>
               <a:t>+ </a:t>
             </a:r>
             <a:r>
-              <a:rPr lang="es-ES" err="1"/>
+              <a:rPr lang="es-ES" sz="1200" err="1"/>
               <a:t>public</a:t>
             </a:r>
-            <a:endParaRPr lang="es-ES"/>
+            <a:endParaRPr lang="es-ES" sz="1200"/>
           </a:p>
           <a:p>
             <a:pPr lvl="3"/>
             <a:r>
-              <a:rPr lang="es-ES"/>
+              <a:rPr lang="es-ES" sz="1100"/>
               <a:t>Accesible </a:t>
             </a:r>
           </a:p>
           <a:p>
             <a:pPr lvl="2"/>
             <a:r>
-              <a:rPr lang="es-ES"/>
+              <a:rPr lang="es-ES" sz="1200"/>
               <a:t>- </a:t>
             </a:r>
             <a:r>
-              <a:rPr lang="es-ES" err="1"/>
+              <a:rPr lang="es-ES" sz="1200" err="1"/>
               <a:t>private</a:t>
             </a:r>
-            <a:endParaRPr lang="es-ES"/>
+            <a:endParaRPr lang="es-ES" sz="1200"/>
           </a:p>
           <a:p>
             <a:pPr lvl="3"/>
             <a:r>
-              <a:rPr lang="es-ES"/>
+              <a:rPr lang="es-ES" sz="1100"/>
               <a:t>No accesible</a:t>
             </a:r>
           </a:p>
           <a:p>
             <a:pPr lvl="2"/>
             <a:r>
-              <a:rPr lang="es-ES"/>
+              <a:rPr lang="es-ES" sz="1200"/>
               <a:t># </a:t>
             </a:r>
             <a:r>
-              <a:rPr lang="es-ES" err="1"/>
+              <a:rPr lang="es-ES" sz="1200" err="1"/>
               <a:t>protected</a:t>
             </a:r>
-            <a:endParaRPr lang="es-ES"/>
+            <a:endParaRPr lang="es-ES" sz="1200"/>
           </a:p>
           <a:p>
             <a:pPr lvl="3"/>
             <a:r>
-              <a:rPr lang="es-ES"/>
+              <a:rPr lang="es-ES" sz="1100"/>
               <a:t>Solo </a:t>
             </a:r>
             <a:r>
-              <a:rPr lang="es-ES" b="1">
+              <a:rPr lang="es-ES" sz="1100" b="1">
                 <a:solidFill>
                   <a:schemeClr val="accent2"/>
                 </a:solidFill>
@@ -16210,34 +15012,34 @@
           <a:p>
             <a:pPr lvl="2"/>
             <a:r>
-              <a:rPr lang="es-ES"/>
+              <a:rPr lang="es-ES" sz="1200"/>
               <a:t>~ (</a:t>
             </a:r>
             <a:r>
-              <a:rPr lang="es-ES" i="1" err="1"/>
+              <a:rPr lang="es-ES" sz="1200" i="1" err="1"/>
               <a:t>package</a:t>
             </a:r>
             <a:r>
-              <a:rPr lang="es-ES"/>
+              <a:rPr lang="es-ES" sz="1200"/>
               <a:t>) </a:t>
             </a:r>
             <a:r>
-              <a:rPr lang="es-ES" sz="800"/>
+              <a:rPr lang="es-ES" sz="700"/>
               <a:t>(</a:t>
             </a:r>
             <a:r>
-              <a:rPr lang="es-ES" sz="800" err="1"/>
+              <a:rPr lang="es-ES" sz="700" err="1"/>
               <a:t>altGr</a:t>
             </a:r>
             <a:r>
-              <a:rPr lang="es-ES" sz="800"/>
+              <a:rPr lang="es-ES" sz="700"/>
               <a:t> 4)                por defecto</a:t>
             </a:r>
           </a:p>
           <a:p>
             <a:pPr lvl="3"/>
             <a:r>
-              <a:rPr lang="es-ES"/>
+              <a:rPr lang="es-ES" sz="1100"/>
               <a:t>Solo clases del mismo paquete</a:t>
             </a:r>
           </a:p>
@@ -16267,7 +15069,7 @@
           <a:lstStyle/>
           <a:p>
             <a:r>
-              <a:rPr lang="es-ES" dirty="0"/>
+              <a:rPr lang="es-ES"/>
               <a:t>5. CARACTERÍSTICAS TAREA ED5a0702 </a:t>
             </a:r>
           </a:p>
@@ -16326,14 +15128,14 @@
           <p:nvPr>
             <p:extLst>
               <p:ext uri="{D42A27DB-BD31-4B8C-83A1-F6EECF244321}">
-                <p14:modId xmlns:p14="http://schemas.microsoft.com/office/powerpoint/2010/main" val="450731878"/>
+                <p14:modId xmlns:p14="http://schemas.microsoft.com/office/powerpoint/2010/main" val="3767676072"/>
               </p:ext>
             </p:extLst>
           </p:nvPr>
         </p:nvGraphicFramePr>
         <p:xfrm>
-          <a:off x="605149" y="4500908"/>
-          <a:ext cx="1800200" cy="1878024"/>
+          <a:off x="2864699" y="4641504"/>
+          <a:ext cx="1800200" cy="1612305"/>
         </p:xfrm>
         <a:graphic>
           <a:graphicData uri="http://schemas.openxmlformats.org/drawingml/2006/table">
@@ -16350,7 +15152,7 @@
                   </a:extLst>
                 </a:gridCol>
               </a:tblGrid>
-              <a:tr h="573252">
+              <a:tr h="307533">
                 <a:tc>
                   <a:txBody>
                     <a:bodyPr/>
@@ -16635,7 +15437,7 @@
         </p:blipFill>
         <p:spPr>
           <a:xfrm>
-            <a:off x="6264986" y="3040469"/>
+            <a:off x="5998286" y="3288269"/>
             <a:ext cx="313184" cy="313184"/>
           </a:xfrm>
           <a:prstGeom prst="rect">
@@ -16658,14 +15460,14 @@
           <p:nvPr>
             <p:extLst>
               <p:ext uri="{D42A27DB-BD31-4B8C-83A1-F6EECF244321}">
-                <p14:modId xmlns:p14="http://schemas.microsoft.com/office/powerpoint/2010/main" val="2498846995"/>
+                <p14:modId xmlns:p14="http://schemas.microsoft.com/office/powerpoint/2010/main" val="2981239932"/>
               </p:ext>
             </p:extLst>
           </p:nvPr>
         </p:nvGraphicFramePr>
         <p:xfrm>
-          <a:off x="2837397" y="4500908"/>
-          <a:ext cx="1800200" cy="1878024"/>
+          <a:off x="4941933" y="4609942"/>
+          <a:ext cx="1800200" cy="1788899"/>
         </p:xfrm>
         <a:graphic>
           <a:graphicData uri="http://schemas.openxmlformats.org/drawingml/2006/table">
@@ -16682,7 +15484,7 @@
                   </a:extLst>
                 </a:gridCol>
               </a:tblGrid>
-              <a:tr h="573252">
+              <a:tr h="539219">
                 <a:tc>
                   <a:txBody>
                     <a:bodyPr/>
@@ -16750,7 +15552,7 @@
                   </a:ext>
                 </a:extLst>
               </a:tr>
-              <a:tr h="573252">
+              <a:tr h="619699">
                 <a:tc>
                   <a:txBody>
                     <a:bodyPr/>
@@ -16843,7 +15645,7 @@
                   </a:ext>
                 </a:extLst>
               </a:tr>
-              <a:tr h="573252">
+              <a:tr h="482882">
                 <a:tc>
                   <a:txBody>
                     <a:bodyPr/>
@@ -16939,14 +15741,14 @@
           <p:nvPr>
             <p:extLst>
               <p:ext uri="{D42A27DB-BD31-4B8C-83A1-F6EECF244321}">
-                <p14:modId xmlns:p14="http://schemas.microsoft.com/office/powerpoint/2010/main" val="4196264884"/>
+                <p14:modId xmlns:p14="http://schemas.microsoft.com/office/powerpoint/2010/main" val="3958300803"/>
               </p:ext>
             </p:extLst>
           </p:nvPr>
         </p:nvGraphicFramePr>
         <p:xfrm>
-          <a:off x="5069645" y="4517532"/>
-          <a:ext cx="1800200" cy="1878024"/>
+          <a:off x="7038224" y="4363319"/>
+          <a:ext cx="1800200" cy="1883386"/>
         </p:xfrm>
         <a:graphic>
           <a:graphicData uri="http://schemas.openxmlformats.org/drawingml/2006/table">
@@ -16963,7 +15765,7 @@
                   </a:extLst>
                 </a:gridCol>
               </a:tblGrid>
-              <a:tr h="573252">
+              <a:tr h="578614">
                 <a:tc>
                   <a:txBody>
                     <a:bodyPr/>
@@ -17219,7 +16021,7 @@
         </p:nvSpPr>
         <p:spPr>
           <a:xfrm>
-            <a:off x="1228165" y="4302675"/>
+            <a:off x="3447767" y="4435472"/>
             <a:ext cx="2091979" cy="2092881"/>
           </a:xfrm>
           <a:prstGeom prst="rect">
@@ -17490,23 +16292,23 @@
           </a:bodyPr>
           <a:lstStyle/>
           <a:p>
-            <a:endParaRPr lang="es-ES" dirty="0"/>
+            <a:endParaRPr lang="es-ES"/>
           </a:p>
           <a:p>
             <a:pPr lvl="1"/>
             <a:r>
-              <a:rPr lang="es-ES" dirty="0"/>
+              <a:rPr lang="es-ES"/>
               <a:t>Consiste en crear nuevas clases extendiendo clases existentes</a:t>
             </a:r>
           </a:p>
           <a:p>
             <a:pPr lvl="1"/>
             <a:r>
-              <a:rPr lang="es-ES" dirty="0"/>
+              <a:rPr lang="es-ES"/>
               <a:t>Permite la </a:t>
             </a:r>
             <a:r>
-              <a:rPr lang="es-ES" dirty="0">
+              <a:rPr lang="es-ES">
                 <a:solidFill>
                   <a:schemeClr val="accent4"/>
                 </a:solidFill>
@@ -17514,18 +16316,18 @@
               <a:t>reutilización</a:t>
             </a:r>
             <a:r>
-              <a:rPr lang="es-ES" dirty="0"/>
+              <a:rPr lang="es-ES"/>
               <a:t> de código</a:t>
             </a:r>
           </a:p>
           <a:p>
             <a:pPr lvl="1"/>
             <a:r>
-              <a:rPr lang="es-ES" dirty="0"/>
+              <a:rPr lang="es-ES"/>
               <a:t>La clase Padre dona </a:t>
             </a:r>
             <a:r>
-              <a:rPr lang="es-ES" dirty="0">
+              <a:rPr lang="es-ES">
                 <a:solidFill>
                   <a:schemeClr val="accent4"/>
                 </a:solidFill>
@@ -17533,7 +16335,7 @@
               <a:t>TODOS</a:t>
             </a:r>
             <a:r>
-              <a:rPr lang="es-ES" dirty="0"/>
+              <a:rPr lang="es-ES"/>
               <a:t> sus atributos y métodos a la clase Hija</a:t>
             </a:r>
           </a:p>
@@ -17541,23 +16343,23 @@
             <a:pPr marL="914400" lvl="2" indent="0">
               <a:buNone/>
             </a:pPr>
-            <a:endParaRPr lang="es-ES" dirty="0"/>
+            <a:endParaRPr lang="es-ES"/>
           </a:p>
           <a:p>
             <a:pPr lvl="1"/>
-            <a:endParaRPr lang="es-ES" dirty="0"/>
+            <a:endParaRPr lang="es-ES"/>
           </a:p>
           <a:p>
             <a:pPr lvl="1"/>
-            <a:endParaRPr lang="es-ES" dirty="0"/>
+            <a:endParaRPr lang="es-ES"/>
           </a:p>
           <a:p>
             <a:pPr lvl="1"/>
-            <a:endParaRPr lang="es-ES" dirty="0"/>
+            <a:endParaRPr lang="es-ES"/>
           </a:p>
           <a:p>
             <a:pPr lvl="1"/>
-            <a:endParaRPr lang="es-ES" dirty="0"/>
+            <a:endParaRPr lang="es-ES"/>
           </a:p>
         </p:txBody>
       </p:sp>
@@ -17585,7 +16387,7 @@
           <a:lstStyle/>
           <a:p>
             <a:r>
-              <a:rPr lang="es-ES" dirty="0"/>
+              <a:rPr lang="es-ES"/>
               <a:t>5. CARACTERÍSTICAS</a:t>
             </a:r>
           </a:p>
@@ -18298,8 +17100,8 @@
         </p:nvSpPr>
         <p:spPr>
           <a:xfrm>
-            <a:off x="547415" y="1175657"/>
-            <a:ext cx="7409044" cy="4945177"/>
+            <a:off x="3447190" y="270611"/>
+            <a:ext cx="6761522" cy="4945177"/>
           </a:xfrm>
         </p:spPr>
         <p:txBody>
@@ -18470,6 +17272,47 @@
               <a:t>2</a:t>
             </a:fld>
             <a:endParaRPr lang="es-ES"/>
+          </a:p>
+        </p:txBody>
+      </p:sp>
+      <p:sp>
+        <p:nvSpPr>
+          <p:cNvPr id="6" name="CuadroTexto 5">
+            <a:extLst>
+              <a:ext uri="{FF2B5EF4-FFF2-40B4-BE49-F238E27FC236}">
+                <a16:creationId xmlns:a16="http://schemas.microsoft.com/office/drawing/2014/main" id="{99A0FB2D-9175-B35C-E0B6-DF5046D0407F}"/>
+              </a:ext>
+            </a:extLst>
+          </p:cNvPr>
+          <p:cNvSpPr txBox="1"/>
+          <p:nvPr/>
+        </p:nvSpPr>
+        <p:spPr>
+          <a:xfrm>
+            <a:off x="284966" y="5215788"/>
+            <a:ext cx="5990573" cy="276999"/>
+          </a:xfrm>
+          <a:prstGeom prst="rect">
+            <a:avLst/>
+          </a:prstGeom>
+          <a:noFill/>
+        </p:spPr>
+        <p:txBody>
+          <a:bodyPr wrap="square">
+            <a:spAutoFit/>
+          </a:bodyPr>
+          <a:lstStyle/>
+          <a:p>
+            <a:r>
+              <a:rPr lang="es-ES" sz="1200">
+                <a:hlinkClick r:id="rId2"/>
+              </a:rPr>
+              <a:t>https://github.com/miGUITel/EstructuradaVSpoo</a:t>
+            </a:r>
+            <a:r>
+              <a:rPr lang="es-ES" sz="1200"/>
+              <a:t> </a:t>
+            </a:r>
           </a:p>
         </p:txBody>
       </p:sp>
@@ -19959,7 +18802,7 @@
           <a:lstStyle/>
           <a:p>
             <a:r>
-              <a:rPr lang="es-ES" dirty="0"/>
+              <a:rPr lang="es-ES"/>
               <a:t>5. CARACTERÍSTICAS TAREA ED5a0703</a:t>
             </a:r>
           </a:p>
@@ -20474,14 +19317,14 @@
           </a:bodyPr>
           <a:lstStyle/>
           <a:p>
-            <a:endParaRPr lang="es-ES" dirty="0"/>
-          </a:p>
-          <a:p>
-            <a:r>
-              <a:rPr lang="es-ES" dirty="0"/>
+            <a:endParaRPr lang="es-ES"/>
+          </a:p>
+          <a:p>
+            <a:r>
+              <a:rPr lang="es-ES"/>
               <a:t>Sobrecarga vs sobreescritura</a:t>
             </a:r>
-            <a:endParaRPr lang="es-ES" dirty="0">
+            <a:endParaRPr lang="es-ES">
               <a:highlight>
                 <a:srgbClr val="FFFF00"/>
               </a:highlight>
@@ -20490,7 +19333,7 @@
           <a:p>
             <a:pPr lvl="1"/>
             <a:r>
-              <a:rPr lang="es-ES" b="1" dirty="0">
+              <a:rPr lang="es-ES" b="1">
                 <a:solidFill>
                   <a:schemeClr val="accent4"/>
                 </a:solidFill>
@@ -20498,14 +19341,14 @@
               <a:t>Sobrecarga</a:t>
             </a:r>
             <a:r>
-              <a:rPr lang="es-ES" dirty="0"/>
+              <a:rPr lang="es-ES"/>
               <a:t>: mismo método con diferentes implementaciones según número y tipo de parámetros</a:t>
             </a:r>
           </a:p>
           <a:p>
             <a:pPr lvl="1"/>
             <a:r>
-              <a:rPr lang="es-ES" b="1" dirty="0">
+              <a:rPr lang="es-ES" b="1">
                 <a:solidFill>
                   <a:srgbClr val="00B0F0"/>
                 </a:solidFill>
@@ -20513,21 +19356,21 @@
               <a:t>Sobreescritura</a:t>
             </a:r>
             <a:r>
-              <a:rPr lang="es-ES" dirty="0"/>
+              <a:rPr lang="es-ES"/>
               <a:t>: en la subclase se reescribe un método de la superclase </a:t>
             </a:r>
           </a:p>
           <a:p>
             <a:pPr lvl="1"/>
-            <a:endParaRPr lang="es-ES" dirty="0"/>
+            <a:endParaRPr lang="es-ES"/>
           </a:p>
           <a:p>
             <a:pPr lvl="1"/>
-            <a:endParaRPr lang="es-ES" dirty="0"/>
+            <a:endParaRPr lang="es-ES"/>
           </a:p>
           <a:p>
             <a:pPr lvl="1"/>
-            <a:endParaRPr lang="es-ES" dirty="0"/>
+            <a:endParaRPr lang="es-ES"/>
           </a:p>
         </p:txBody>
       </p:sp>
@@ -20555,7 +19398,7 @@
           <a:lstStyle/>
           <a:p>
             <a:r>
-              <a:rPr lang="es-ES" dirty="0"/>
+              <a:rPr lang="es-ES"/>
               <a:t>5. CARACTERÍSTICAS TAREA ED5a0704</a:t>
             </a:r>
           </a:p>
@@ -21471,51 +20314,51 @@
           <a:lstStyle/>
           <a:p>
             <a:r>
-              <a:rPr lang="es-ES" dirty="0"/>
+              <a:rPr lang="es-ES"/>
               <a:t>Modificadores habituales</a:t>
             </a:r>
           </a:p>
           <a:p>
             <a:pPr lvl="1"/>
             <a:r>
-              <a:rPr lang="es-ES" i="1" dirty="0" err="1"/>
+              <a:rPr lang="es-ES" i="1" err="1"/>
               <a:t>abstract</a:t>
             </a:r>
-            <a:endParaRPr lang="es-ES" i="1" dirty="0"/>
+            <a:endParaRPr lang="es-ES" i="1"/>
           </a:p>
           <a:p>
             <a:pPr lvl="2"/>
             <a:r>
-              <a:rPr lang="es-ES" dirty="0"/>
+              <a:rPr lang="es-ES"/>
               <a:t>Método que no se implementa en la superclase</a:t>
             </a:r>
           </a:p>
           <a:p>
             <a:pPr lvl="2"/>
             <a:r>
-              <a:rPr lang="es-ES" dirty="0"/>
+              <a:rPr lang="es-ES"/>
               <a:t>Debe implementarse en la subclase</a:t>
             </a:r>
           </a:p>
           <a:p>
             <a:pPr lvl="3"/>
             <a:r>
-              <a:rPr lang="es-ES" dirty="0"/>
+              <a:rPr lang="es-ES"/>
               <a:t>(se debe </a:t>
             </a:r>
             <a:r>
-              <a:rPr lang="es-ES" i="1" dirty="0"/>
+              <a:rPr lang="es-ES" i="1"/>
               <a:t>sobrescribir</a:t>
             </a:r>
             <a:r>
-              <a:rPr lang="es-ES" dirty="0"/>
+              <a:rPr lang="es-ES"/>
               <a:t>)</a:t>
             </a:r>
           </a:p>
           <a:p>
             <a:pPr lvl="2"/>
             <a:r>
-              <a:rPr lang="es-ES" dirty="0"/>
+              <a:rPr lang="es-ES"/>
               <a:t>La clase que contiene un método abstracto debe declararse también abstracta</a:t>
             </a:r>
           </a:p>
@@ -21543,7 +20386,7 @@
           <a:lstStyle/>
           <a:p>
             <a:r>
-              <a:rPr lang="es-ES" dirty="0"/>
+              <a:rPr lang="es-ES"/>
               <a:t>6. OTRAS CARACTERÍSTICAS</a:t>
             </a:r>
           </a:p>
@@ -21668,25 +20511,25 @@
           <a:lstStyle/>
           <a:p>
             <a:r>
-              <a:rPr lang="es-ES" dirty="0"/>
+              <a:rPr lang="es-ES"/>
               <a:t>Modificadores habituales</a:t>
             </a:r>
           </a:p>
           <a:p>
             <a:pPr lvl="1"/>
             <a:r>
-              <a:rPr lang="es-ES" u="sng" dirty="0" err="1"/>
+              <a:rPr lang="es-ES" u="sng" err="1"/>
               <a:t>static</a:t>
             </a:r>
           </a:p>
           <a:p>
             <a:pPr lvl="2"/>
             <a:r>
-              <a:rPr lang="es-ES" dirty="0"/>
+              <a:rPr lang="es-ES"/>
               <a:t>En java </a:t>
             </a:r>
             <a:r>
-              <a:rPr lang="es-ES" b="1" dirty="0">
+              <a:rPr lang="es-ES" b="1">
                 <a:solidFill>
                   <a:srgbClr val="FF0000"/>
                 </a:solidFill>
@@ -21694,37 +20537,37 @@
               <a:t>NO</a:t>
             </a:r>
             <a:r>
-              <a:rPr lang="es-ES" dirty="0"/>
+              <a:rPr lang="es-ES"/>
               <a:t> se puede aplicar a la clase completa</a:t>
             </a:r>
           </a:p>
           <a:p>
             <a:pPr lvl="2"/>
-            <a:endParaRPr lang="es-ES" dirty="0"/>
+            <a:endParaRPr lang="es-ES"/>
           </a:p>
           <a:p>
             <a:pPr lvl="2"/>
-            <a:endParaRPr lang="es-ES" dirty="0"/>
+            <a:endParaRPr lang="es-ES"/>
           </a:p>
           <a:p>
             <a:pPr lvl="2"/>
-            <a:endParaRPr lang="es-ES" dirty="0"/>
+            <a:endParaRPr lang="es-ES"/>
           </a:p>
           <a:p>
             <a:pPr lvl="2"/>
-            <a:endParaRPr lang="es-ES" dirty="0"/>
+            <a:endParaRPr lang="es-ES"/>
           </a:p>
           <a:p>
             <a:pPr lvl="2"/>
             <a:r>
-              <a:rPr lang="es-ES" dirty="0"/>
+              <a:rPr lang="es-ES"/>
               <a:t>Elemento (método o atributo) propio de la clase y no de sus objetos</a:t>
             </a:r>
           </a:p>
           <a:p>
             <a:pPr lvl="2"/>
             <a:r>
-              <a:rPr lang="es-ES" dirty="0"/>
+              <a:rPr lang="es-ES"/>
               <a:t>Existen sin instanciar la clase</a:t>
             </a:r>
           </a:p>
@@ -21752,7 +20595,7 @@
           <a:lstStyle/>
           <a:p>
             <a:r>
-              <a:rPr lang="es-ES" dirty="0"/>
+              <a:rPr lang="es-ES"/>
               <a:t>6. OTRAS CARACTERÍSTICAS</a:t>
             </a:r>
           </a:p>
@@ -21960,7 +20803,7 @@
           <a:lstStyle/>
           <a:p>
             <a:r>
-              <a:rPr lang="es-ES" dirty="0"/>
+              <a:rPr lang="es-ES"/>
               <a:t>Modificadores habituales</a:t>
             </a:r>
           </a:p>
@@ -21970,33 +20813,32 @@
               <a:rPr lang="es-ES" u="sng"/>
               <a:t>final</a:t>
             </a:r>
-            <a:endParaRPr lang="es-ES" u="sng" dirty="0"/>
           </a:p>
           <a:p>
             <a:pPr lvl="2"/>
             <a:r>
-              <a:rPr lang="es-ES" dirty="0"/>
+              <a:rPr lang="es-ES"/>
               <a:t>Indica que el elemento no puede ser modificado</a:t>
             </a:r>
           </a:p>
           <a:p>
             <a:pPr lvl="2"/>
             <a:r>
-              <a:rPr lang="es-ES" dirty="0"/>
+              <a:rPr lang="es-ES"/>
               <a:t>Si es un atributo, su valor es constante</a:t>
             </a:r>
           </a:p>
           <a:p>
             <a:pPr lvl="2"/>
             <a:r>
-              <a:rPr lang="es-ES" dirty="0"/>
+              <a:rPr lang="es-ES"/>
               <a:t>Si es una clase, no puede tener descendencia (fin de la herencia)</a:t>
             </a:r>
           </a:p>
           <a:p>
             <a:pPr lvl="2"/>
             <a:r>
-              <a:rPr lang="es-ES" dirty="0"/>
+              <a:rPr lang="es-ES"/>
               <a:t>Método que no se puede sobrescribir al crear una subclase</a:t>
             </a:r>
           </a:p>
@@ -22024,7 +20866,7 @@
           <a:lstStyle/>
           <a:p>
             <a:r>
-              <a:rPr lang="es-ES" dirty="0"/>
+              <a:rPr lang="es-ES"/>
               <a:t>6. OTRAS CARACTERÍSTICAS TAREA ED5a07EX</a:t>
             </a:r>
           </a:p>
@@ -22153,7 +20995,7 @@
           <a:p>
             <a:pPr algn="just"/>
             <a:r>
-              <a:rPr lang="es-ES" sz="1100" u="sng" dirty="0">
+              <a:rPr lang="es-ES" sz="1100" u="sng">
                 <a:latin typeface="Arial"/>
                 <a:cs typeface="Arial"/>
                 <a:hlinkClick r:id="rId2"/>
@@ -22161,20 +21003,20 @@
               <a:t>Guía</a:t>
             </a:r>
             <a:r>
-              <a:rPr lang="es-ES" sz="1100" dirty="0">
+              <a:rPr lang="es-ES" sz="1100">
                 <a:latin typeface="Arial"/>
                 <a:cs typeface="Arial"/>
               </a:rPr>
               <a:t> para iniciar </a:t>
             </a:r>
             <a:r>
-              <a:rPr lang="es-ES" sz="1100" dirty="0" err="1">
+              <a:rPr lang="es-ES" sz="1100" err="1">
                 <a:latin typeface="Arial"/>
                 <a:cs typeface="Arial"/>
               </a:rPr>
               <a:t>git</a:t>
             </a:r>
-            <a:endParaRPr lang="es-ES" sz="1100" dirty="0">
+            <a:endParaRPr lang="es-ES" sz="1100">
               <a:latin typeface="Arial"/>
               <a:cs typeface="Arial"/>
             </a:endParaRPr>
@@ -22182,7 +21024,7 @@
           <a:p>
             <a:pPr algn="just"/>
             <a:r>
-              <a:rPr lang="es-ES" sz="1100" u="sng" dirty="0">
+              <a:rPr lang="es-ES" sz="1100" u="sng">
                 <a:latin typeface="Arial"/>
                 <a:cs typeface="Arial"/>
                 <a:hlinkClick r:id="rId3"/>
@@ -22190,7 +21032,7 @@
               <a:t>Guía</a:t>
             </a:r>
             <a:r>
-              <a:rPr lang="es-ES" sz="1100" dirty="0">
+              <a:rPr lang="es-ES" sz="1100">
                 <a:latin typeface="Arial"/>
                 <a:cs typeface="Arial"/>
               </a:rPr>
@@ -22200,14 +21042,14 @@
           <a:p>
             <a:pPr algn="just"/>
             <a:r>
-              <a:rPr lang="es-ES" sz="1100" dirty="0">
+              <a:rPr lang="es-ES" sz="1100">
                 <a:latin typeface="Arial"/>
                 <a:cs typeface="Arial"/>
                 <a:hlinkClick r:id="rId4"/>
               </a:rPr>
               <a:t>Herencia</a:t>
             </a:r>
-            <a:endParaRPr lang="es-ES" sz="1100" dirty="0">
+            <a:endParaRPr lang="es-ES" sz="1100">
               <a:latin typeface="Arial"/>
               <a:cs typeface="Arial"/>
             </a:endParaRPr>
@@ -22215,27 +21057,27 @@
           <a:p>
             <a:pPr algn="just"/>
             <a:r>
-              <a:rPr lang="es-ES" sz="1100" dirty="0">
+              <a:rPr lang="es-ES" sz="1100">
                 <a:latin typeface="Arial"/>
                 <a:cs typeface="Arial"/>
                 <a:hlinkClick r:id="rId5"/>
               </a:rPr>
               <a:t>Polimorfismo</a:t>
             </a:r>
-            <a:endParaRPr lang="es-ES" sz="1100" dirty="0">
+            <a:endParaRPr lang="es-ES" sz="1100">
               <a:latin typeface="Arial"/>
               <a:cs typeface="Arial"/>
             </a:endParaRPr>
           </a:p>
           <a:p>
             <a:pPr algn="just"/>
-            <a:endParaRPr lang="es-ES" sz="1100" dirty="0">
+            <a:endParaRPr lang="es-ES" sz="1100">
               <a:latin typeface="Arial"/>
               <a:cs typeface="Arial"/>
             </a:endParaRPr>
           </a:p>
           <a:p>
-            <a:endParaRPr lang="es-ES" dirty="0"/>
+            <a:endParaRPr lang="es-ES"/>
           </a:p>
         </p:txBody>
       </p:sp>
@@ -22356,14 +21198,14 @@
           <a:p>
             <a:pPr algn="ctr"/>
             <a:r>
-              <a:rPr lang="es-ES" dirty="0"/>
+              <a:rPr lang="es-ES"/>
               <a:t>Nuestro objetivo es aprender a diseñar programas en el paradigma de la POO</a:t>
             </a:r>
           </a:p>
           <a:p>
             <a:pPr algn="ctr"/>
             <a:r>
-              <a:rPr lang="es-ES" dirty="0"/>
+              <a:rPr lang="es-ES"/>
               <a:t>En primer lugar, tenemos que conocer de manera general la POO</a:t>
             </a:r>
           </a:p>
@@ -22479,18 +21321,18 @@
           <a:lstStyle/>
           <a:p>
             <a:r>
-              <a:rPr lang="es-ES" dirty="0"/>
+              <a:rPr lang="es-ES"/>
               <a:t>Modelizar es simplificar la realidad</a:t>
             </a:r>
           </a:p>
           <a:p>
             <a:pPr lvl="1"/>
             <a:r>
-              <a:rPr lang="es-ES" dirty="0"/>
+              <a:rPr lang="es-ES"/>
               <a:t>Abstracción: elegir elementos </a:t>
             </a:r>
             <a:r>
-              <a:rPr lang="es-ES" b="1" dirty="0">
+              <a:rPr lang="es-ES" b="1">
                 <a:solidFill>
                   <a:schemeClr val="accent2"/>
                 </a:solidFill>
@@ -22501,7 +21343,7 @@
           <a:p>
             <a:pPr lvl="1"/>
             <a:r>
-              <a:rPr lang="es-ES" dirty="0"/>
+              <a:rPr lang="es-ES"/>
               <a:t>Planos	</a:t>
             </a:r>
           </a:p>
@@ -22515,42 +21357,42 @@
           <a:p>
             <a:pPr lvl="2"/>
             <a:r>
-              <a:rPr lang="es-ES" dirty="0"/>
+              <a:rPr lang="es-ES"/>
               <a:t>Detallados</a:t>
             </a:r>
           </a:p>
           <a:p>
             <a:pPr lvl="2"/>
             <a:r>
-              <a:rPr lang="es-ES" dirty="0"/>
+              <a:rPr lang="es-ES"/>
               <a:t>Nos guían en la construcción</a:t>
             </a:r>
           </a:p>
           <a:p>
             <a:pPr lvl="1"/>
             <a:r>
-              <a:rPr lang="es-ES" dirty="0"/>
+              <a:rPr lang="es-ES"/>
               <a:t>Funciones:</a:t>
             </a:r>
           </a:p>
           <a:p>
             <a:pPr lvl="2"/>
             <a:r>
-              <a:rPr lang="es-ES" dirty="0"/>
+              <a:rPr lang="es-ES"/>
               <a:t>Cómo es o queremos que sea nuestro sistema o producto</a:t>
             </a:r>
           </a:p>
           <a:p>
             <a:pPr lvl="2"/>
             <a:r>
-              <a:rPr lang="es-ES" dirty="0"/>
+              <a:rPr lang="es-ES"/>
               <a:t>Mostrar estructura o comportamiento</a:t>
             </a:r>
           </a:p>
           <a:p>
             <a:pPr lvl="2"/>
             <a:r>
-              <a:rPr lang="es-ES" dirty="0"/>
+              <a:rPr lang="es-ES"/>
               <a:t>Documentar las decisiones</a:t>
             </a:r>
           </a:p>
@@ -22582,7 +21424,7 @@
               <a:buNone/>
             </a:pPr>
             <a:r>
-              <a:rPr lang="es-ES" dirty="0"/>
+              <a:rPr lang="es-ES"/>
               <a:t>1. Modelización (Adelanto de la UT8)</a:t>
             </a:r>
           </a:p>
@@ -23032,14 +21874,14 @@
           <a:p>
             <a:pPr algn="r"/>
             <a:r>
-              <a:rPr lang="es-ES" dirty="0"/>
+              <a:rPr lang="es-ES"/>
               <a:t>¿Qué sabéis?</a:t>
             </a:r>
           </a:p>
           <a:p>
             <a:pPr algn="r"/>
             <a:r>
-              <a:rPr lang="es-ES" dirty="0">
+              <a:rPr lang="es-ES">
                 <a:solidFill>
                   <a:schemeClr val="tx1"/>
                 </a:solidFill>
@@ -23049,7 +21891,7 @@
           </a:p>
           <a:p>
             <a:pPr algn="r"/>
-            <a:endParaRPr lang="es-ES" dirty="0"/>
+            <a:endParaRPr lang="es-ES"/>
           </a:p>
         </p:txBody>
       </p:sp>
